--- a/ControlFlows/Python_ControlFlow .pptx
+++ b/ControlFlows/Python_ControlFlow .pptx
@@ -2857,7 +2857,7 @@
         <p:spPr>
           <a:xfrm>
             <a:off x="0" y="0"/>
-            <a:ext cx="8759952" cy="354817"/>
+            <a:ext cx="9116568" cy="354817"/>
           </a:xfrm>
           <a:prstGeom prst="rect">
             <a:avLst/>
@@ -3265,8 +3265,8 @@
         </p:nvSpPr>
         <p:spPr>
           <a:xfrm>
-            <a:off x="226653" y="1635733"/>
-            <a:ext cx="3822192" cy="749808"/>
+            <a:off x="226652" y="1635732"/>
+            <a:ext cx="4062633" cy="959673"/>
           </a:xfrm>
           <a:prstGeom prst="rect">
             <a:avLst/>
@@ -4069,7 +4069,7 @@
         <p:spPr>
           <a:xfrm>
             <a:off x="4648450" y="414932"/>
-            <a:ext cx="3474720" cy="246888"/>
+            <a:ext cx="2524078" cy="167596"/>
           </a:xfrm>
           <a:prstGeom prst="rect">
             <a:avLst/>
@@ -4094,7 +4094,7 @@
         <p:spPr>
           <a:xfrm>
             <a:off x="4648450" y="414932"/>
-            <a:ext cx="3474720" cy="246888"/>
+            <a:ext cx="2225763" cy="152607"/>
           </a:xfrm>
           <a:prstGeom prst="rect">
             <a:avLst/>
@@ -4132,8 +4132,8 @@
         </p:nvSpPr>
         <p:spPr>
           <a:xfrm>
-            <a:off x="4648450" y="689252"/>
-            <a:ext cx="4224528" cy="1078992"/>
+            <a:off x="4633910" y="582607"/>
+            <a:ext cx="4224528" cy="1226088"/>
           </a:xfrm>
           <a:prstGeom prst="rect">
             <a:avLst/>
@@ -4157,8 +4157,8 @@
         </p:nvSpPr>
         <p:spPr>
           <a:xfrm>
-            <a:off x="4776466" y="780692"/>
-            <a:ext cx="3968496" cy="896112"/>
+            <a:off x="4670184" y="588686"/>
+            <a:ext cx="4199495" cy="1226364"/>
           </a:xfrm>
           <a:prstGeom prst="rect">
             <a:avLst/>
@@ -4338,8 +4338,8 @@
         </p:nvSpPr>
         <p:spPr>
           <a:xfrm>
-            <a:off x="4648450" y="1823108"/>
-            <a:ext cx="3657600" cy="246888"/>
+            <a:off x="4617721" y="1856894"/>
+            <a:ext cx="3476091" cy="198689"/>
           </a:xfrm>
           <a:prstGeom prst="rect">
             <a:avLst/>
@@ -4363,8 +4363,8 @@
         </p:nvSpPr>
         <p:spPr>
           <a:xfrm>
-            <a:off x="4648450" y="1823108"/>
-            <a:ext cx="3657600" cy="246888"/>
+            <a:off x="4572000" y="1829618"/>
+            <a:ext cx="2290308" cy="246888"/>
           </a:xfrm>
           <a:prstGeom prst="rect">
             <a:avLst/>
@@ -4402,8 +4402,8 @@
         </p:nvSpPr>
         <p:spPr>
           <a:xfrm>
-            <a:off x="4648450" y="2097428"/>
-            <a:ext cx="4224528" cy="1005840"/>
+            <a:off x="4648450" y="2097427"/>
+            <a:ext cx="4268898" cy="1136559"/>
           </a:xfrm>
           <a:prstGeom prst="rect">
             <a:avLst/>
@@ -4427,8 +4427,8 @@
         </p:nvSpPr>
         <p:spPr>
           <a:xfrm>
-            <a:off x="4776466" y="2188868"/>
-            <a:ext cx="3968496" cy="822960"/>
+            <a:off x="4648449" y="2097426"/>
+            <a:ext cx="4199495" cy="1118169"/>
           </a:xfrm>
           <a:prstGeom prst="rect">
             <a:avLst/>
@@ -4444,7 +4444,7 @@
               <a:buNone/>
             </a:pPr>
             <a:r>
-              <a:rPr lang="en-US" sz="980" dirty="0">
+              <a:rPr lang="en-US" sz="800" dirty="0">
                 <a:solidFill>
                   <a:srgbClr val="7DD3FC"/>
                 </a:solidFill>
@@ -4454,14 +4454,14 @@
               </a:rPr>
               <a:t>env    = "prod"</a:t>
             </a:r>
-            <a:endParaRPr lang="en-US" sz="980" dirty="0"/>
-          </a:p>
-          <a:p>
-            <a:pPr marL="0" indent="0">
-              <a:buNone/>
-            </a:pPr>
-            <a:r>
-              <a:rPr lang="en-US" sz="980" dirty="0">
+            <a:endParaRPr lang="en-US" sz="800" dirty="0"/>
+          </a:p>
+          <a:p>
+            <a:pPr marL="0" indent="0">
+              <a:buNone/>
+            </a:pPr>
+            <a:r>
+              <a:rPr lang="en-US" sz="800" dirty="0">
                 <a:solidFill>
                   <a:srgbClr val="7DD3FC"/>
                 </a:solidFill>
@@ -4471,20 +4471,20 @@
               </a:rPr>
               <a:t>region = "asia-south1"</a:t>
             </a:r>
-            <a:endParaRPr lang="en-US" sz="980" dirty="0"/>
-          </a:p>
-          <a:p>
-            <a:pPr marL="0" indent="0">
-              <a:buNone/>
-            </a:pPr>
-            <a:endParaRPr lang="en-US" sz="980" dirty="0"/>
-          </a:p>
-          <a:p>
-            <a:pPr marL="0" indent="0">
-              <a:buNone/>
-            </a:pPr>
-            <a:r>
-              <a:rPr lang="en-US" sz="980" dirty="0">
+            <a:endParaRPr lang="en-US" sz="800" dirty="0"/>
+          </a:p>
+          <a:p>
+            <a:pPr marL="0" indent="0">
+              <a:buNone/>
+            </a:pPr>
+            <a:endParaRPr lang="en-US" sz="800" dirty="0"/>
+          </a:p>
+          <a:p>
+            <a:pPr marL="0" indent="0">
+              <a:buNone/>
+            </a:pPr>
+            <a:r>
+              <a:rPr lang="en-US" sz="800" dirty="0">
                 <a:solidFill>
                   <a:srgbClr val="7DD3FC"/>
                 </a:solidFill>
@@ -4494,14 +4494,14 @@
               </a:rPr>
               <a:t>if env == "prod" and region.startswith("asia-"):</a:t>
             </a:r>
-            <a:endParaRPr lang="en-US" sz="980" dirty="0"/>
-          </a:p>
-          <a:p>
-            <a:pPr marL="0" indent="0">
-              <a:buNone/>
-            </a:pPr>
-            <a:r>
-              <a:rPr lang="en-US" sz="980" dirty="0">
+            <a:endParaRPr lang="en-US" sz="800" dirty="0"/>
+          </a:p>
+          <a:p>
+            <a:pPr marL="0" indent="0">
+              <a:buNone/>
+            </a:pPr>
+            <a:r>
+              <a:rPr lang="en-US" sz="800" dirty="0">
                 <a:solidFill>
                   <a:srgbClr val="7DD3FC"/>
                 </a:solidFill>
@@ -4511,14 +4511,14 @@
               </a:rPr>
               <a:t>    print("Production in Asia region")</a:t>
             </a:r>
-            <a:endParaRPr lang="en-US" sz="980" dirty="0"/>
-          </a:p>
-          <a:p>
-            <a:pPr marL="0" indent="0">
-              <a:buNone/>
-            </a:pPr>
-            <a:r>
-              <a:rPr lang="en-US" sz="980" dirty="0">
+            <a:endParaRPr lang="en-US" sz="800" dirty="0"/>
+          </a:p>
+          <a:p>
+            <a:pPr marL="0" indent="0">
+              <a:buNone/>
+            </a:pPr>
+            <a:r>
+              <a:rPr lang="en-US" sz="800" dirty="0">
                 <a:solidFill>
                   <a:srgbClr val="7DD3FC"/>
                 </a:solidFill>
@@ -4528,14 +4528,14 @@
               </a:rPr>
               <a:t>elif env == "prod":</a:t>
             </a:r>
-            <a:endParaRPr lang="en-US" sz="980" dirty="0"/>
-          </a:p>
-          <a:p>
-            <a:pPr marL="0" indent="0">
-              <a:buNone/>
-            </a:pPr>
-            <a:r>
-              <a:rPr lang="en-US" sz="980" dirty="0">
+            <a:endParaRPr lang="en-US" sz="800" dirty="0"/>
+          </a:p>
+          <a:p>
+            <a:pPr marL="0" indent="0">
+              <a:buNone/>
+            </a:pPr>
+            <a:r>
+              <a:rPr lang="en-US" sz="800" dirty="0">
                 <a:solidFill>
                   <a:srgbClr val="7DD3FC"/>
                 </a:solidFill>
@@ -4545,14 +4545,14 @@
               </a:rPr>
               <a:t>    print("Production — other region")</a:t>
             </a:r>
-            <a:endParaRPr lang="en-US" sz="980" dirty="0"/>
-          </a:p>
-          <a:p>
-            <a:pPr marL="0" indent="0">
-              <a:buNone/>
-            </a:pPr>
-            <a:r>
-              <a:rPr lang="en-US" sz="980" dirty="0">
+            <a:endParaRPr lang="en-US" sz="800" dirty="0"/>
+          </a:p>
+          <a:p>
+            <a:pPr marL="0" indent="0">
+              <a:buNone/>
+            </a:pPr>
+            <a:r>
+              <a:rPr lang="en-US" sz="800" dirty="0">
                 <a:solidFill>
                   <a:srgbClr val="7DD3FC"/>
                 </a:solidFill>
@@ -4562,14 +4562,14 @@
               </a:rPr>
               <a:t>else:</a:t>
             </a:r>
-            <a:endParaRPr lang="en-US" sz="980" dirty="0"/>
-          </a:p>
-          <a:p>
-            <a:pPr marL="0" indent="0">
-              <a:buNone/>
-            </a:pPr>
-            <a:r>
-              <a:rPr lang="en-US" sz="980" dirty="0">
+            <a:endParaRPr lang="en-US" sz="800" dirty="0"/>
+          </a:p>
+          <a:p>
+            <a:pPr marL="0" indent="0">
+              <a:buNone/>
+            </a:pPr>
+            <a:r>
+              <a:rPr lang="en-US" sz="800" dirty="0">
                 <a:solidFill>
                   <a:srgbClr val="7DD3FC"/>
                 </a:solidFill>
@@ -4579,7 +4579,7 @@
               </a:rPr>
               <a:t>    print("Non-production environment")</a:t>
             </a:r>
-            <a:endParaRPr lang="en-US" sz="980" dirty="0"/>
+            <a:endParaRPr lang="en-US" sz="800" dirty="0"/>
           </a:p>
         </p:txBody>
       </p:sp>
@@ -4591,8 +4591,8 @@
         </p:nvSpPr>
         <p:spPr>
           <a:xfrm>
-            <a:off x="4648450" y="3158132"/>
-            <a:ext cx="3840480" cy="246888"/>
+            <a:off x="4648450" y="3320257"/>
+            <a:ext cx="2743349" cy="158238"/>
           </a:xfrm>
           <a:prstGeom prst="rect">
             <a:avLst/>
@@ -4616,8 +4616,8 @@
         </p:nvSpPr>
         <p:spPr>
           <a:xfrm>
-            <a:off x="4648450" y="3158132"/>
-            <a:ext cx="3840480" cy="246888"/>
+            <a:off x="4648450" y="3320257"/>
+            <a:ext cx="2743349" cy="158238"/>
           </a:xfrm>
           <a:prstGeom prst="rect">
             <a:avLst/>
@@ -4655,8 +4655,8 @@
         </p:nvSpPr>
         <p:spPr>
           <a:xfrm>
-            <a:off x="4648450" y="3432452"/>
-            <a:ext cx="4224528" cy="768096"/>
+            <a:off x="4633910" y="3523891"/>
+            <a:ext cx="4275056" cy="1347071"/>
           </a:xfrm>
           <a:prstGeom prst="rect">
             <a:avLst/>
@@ -4671,6 +4671,13 @@
             <a:prstDash val="solid"/>
           </a:ln>
         </p:spPr>
+        <p:txBody>
+          <a:bodyPr/>
+          <a:lstStyle/>
+          <a:p>
+            <a:endParaRPr lang="en-US" dirty="0"/>
+          </a:p>
+        </p:txBody>
       </p:sp>
       <p:sp>
         <p:nvSpPr>
@@ -4680,8 +4687,8 @@
         </p:nvSpPr>
         <p:spPr>
           <a:xfrm>
-            <a:off x="4776466" y="3523892"/>
-            <a:ext cx="3968496" cy="585216"/>
+            <a:off x="4662690" y="3522718"/>
+            <a:ext cx="3968496" cy="1243583"/>
           </a:xfrm>
           <a:prstGeom prst="rect">
             <a:avLst/>
@@ -4697,7 +4704,7 @@
               <a:buNone/>
             </a:pPr>
             <a:r>
-              <a:rPr lang="en-US" sz="980" dirty="0">
+              <a:rPr lang="en-US" sz="800" dirty="0">
                 <a:solidFill>
                   <a:srgbClr val="7DD3FC"/>
                 </a:solidFill>
@@ -4707,14 +4714,14 @@
               </a:rPr>
               <a:t># Instead of 10 elif branches — use a dict</a:t>
             </a:r>
-            <a:endParaRPr lang="en-US" sz="980" dirty="0"/>
-          </a:p>
-          <a:p>
-            <a:pPr marL="0" indent="0">
-              <a:buNone/>
-            </a:pPr>
-            <a:r>
-              <a:rPr lang="en-US" sz="980" dirty="0">
+            <a:endParaRPr lang="en-US" sz="800" dirty="0"/>
+          </a:p>
+          <a:p>
+            <a:pPr marL="0" indent="0">
+              <a:buNone/>
+            </a:pPr>
+            <a:r>
+              <a:rPr lang="en-US" sz="800" dirty="0">
                 <a:solidFill>
                   <a:srgbClr val="7DD3FC"/>
                 </a:solidFill>
@@ -4724,14 +4731,14 @@
               </a:rPr>
               <a:t>handlers = {</a:t>
             </a:r>
-            <a:endParaRPr lang="en-US" sz="980" dirty="0"/>
-          </a:p>
-          <a:p>
-            <a:pPr marL="0" indent="0">
-              <a:buNone/>
-            </a:pPr>
-            <a:r>
-              <a:rPr lang="en-US" sz="980" dirty="0">
+            <a:endParaRPr lang="en-US" sz="800" dirty="0"/>
+          </a:p>
+          <a:p>
+            <a:pPr marL="0" indent="0">
+              <a:buNone/>
+            </a:pPr>
+            <a:r>
+              <a:rPr lang="en-US" sz="800" dirty="0">
                 <a:solidFill>
                   <a:srgbClr val="7DD3FC"/>
                 </a:solidFill>
@@ -4741,14 +4748,14 @@
               </a:rPr>
               <a:t>    "start":   "Starting service...",</a:t>
             </a:r>
-            <a:endParaRPr lang="en-US" sz="980" dirty="0"/>
-          </a:p>
-          <a:p>
-            <a:pPr marL="0" indent="0">
-              <a:buNone/>
-            </a:pPr>
-            <a:r>
-              <a:rPr lang="en-US" sz="980" dirty="0">
+            <a:endParaRPr lang="en-US" sz="800" dirty="0"/>
+          </a:p>
+          <a:p>
+            <a:pPr marL="0" indent="0">
+              <a:buNone/>
+            </a:pPr>
+            <a:r>
+              <a:rPr lang="en-US" sz="800" dirty="0">
                 <a:solidFill>
                   <a:srgbClr val="7DD3FC"/>
                 </a:solidFill>
@@ -4758,14 +4765,14 @@
               </a:rPr>
               <a:t>    "stop":    "Stopping service...",</a:t>
             </a:r>
-            <a:endParaRPr lang="en-US" sz="980" dirty="0"/>
-          </a:p>
-          <a:p>
-            <a:pPr marL="0" indent="0">
-              <a:buNone/>
-            </a:pPr>
-            <a:r>
-              <a:rPr lang="en-US" sz="980" dirty="0">
+            <a:endParaRPr lang="en-US" sz="800" dirty="0"/>
+          </a:p>
+          <a:p>
+            <a:pPr marL="0" indent="0">
+              <a:buNone/>
+            </a:pPr>
+            <a:r>
+              <a:rPr lang="en-US" sz="800" dirty="0">
                 <a:solidFill>
                   <a:srgbClr val="7DD3FC"/>
                 </a:solidFill>
@@ -4775,14 +4782,14 @@
               </a:rPr>
               <a:t>    "restart": "Restarting service...",</a:t>
             </a:r>
-            <a:endParaRPr lang="en-US" sz="980" dirty="0"/>
-          </a:p>
-          <a:p>
-            <a:pPr marL="0" indent="0">
-              <a:buNone/>
-            </a:pPr>
-            <a:r>
-              <a:rPr lang="en-US" sz="980" dirty="0">
+            <a:endParaRPr lang="en-US" sz="800" dirty="0"/>
+          </a:p>
+          <a:p>
+            <a:pPr marL="0" indent="0">
+              <a:buNone/>
+            </a:pPr>
+            <a:r>
+              <a:rPr lang="en-US" sz="800" dirty="0">
                 <a:solidFill>
                   <a:srgbClr val="7DD3FC"/>
                 </a:solidFill>
@@ -4792,14 +4799,14 @@
               </a:rPr>
               <a:t>}</a:t>
             </a:r>
-            <a:endParaRPr lang="en-US" sz="980" dirty="0"/>
-          </a:p>
-          <a:p>
-            <a:pPr marL="0" indent="0">
-              <a:buNone/>
-            </a:pPr>
-            <a:r>
-              <a:rPr lang="en-US" sz="980" dirty="0">
+            <a:endParaRPr lang="en-US" sz="800" dirty="0"/>
+          </a:p>
+          <a:p>
+            <a:pPr marL="0" indent="0">
+              <a:buNone/>
+            </a:pPr>
+            <a:r>
+              <a:rPr lang="en-US" sz="800" dirty="0">
                 <a:solidFill>
                   <a:srgbClr val="7DD3FC"/>
                 </a:solidFill>
@@ -4809,14 +4816,14 @@
               </a:rPr>
               <a:t>action = "restart"</a:t>
             </a:r>
-            <a:endParaRPr lang="en-US" sz="980" dirty="0"/>
-          </a:p>
-          <a:p>
-            <a:pPr marL="0" indent="0">
-              <a:buNone/>
-            </a:pPr>
-            <a:r>
-              <a:rPr lang="en-US" sz="980" dirty="0">
+            <a:endParaRPr lang="en-US" sz="800" dirty="0"/>
+          </a:p>
+          <a:p>
+            <a:pPr marL="0" indent="0">
+              <a:buNone/>
+            </a:pPr>
+            <a:r>
+              <a:rPr lang="en-US" sz="800" dirty="0">
                 <a:solidFill>
                   <a:srgbClr val="7DD3FC"/>
                 </a:solidFill>
@@ -4826,144 +4833,7 @@
               </a:rPr>
               <a:t>print(handlers.get(action, "Unknown action"))</a:t>
             </a:r>
-            <a:endParaRPr lang="en-US" sz="980" dirty="0"/>
-          </a:p>
-        </p:txBody>
-      </p:sp>
-      <p:sp>
-        <p:nvSpPr>
-          <p:cNvPr id="44" name="Shape 42"/>
-          <p:cNvSpPr/>
-          <p:nvPr/>
-        </p:nvSpPr>
-        <p:spPr>
-          <a:xfrm>
-            <a:off x="4648450" y="4246268"/>
-            <a:ext cx="4224528" cy="475488"/>
-          </a:xfrm>
-          <a:prstGeom prst="rect">
-            <a:avLst/>
-          </a:prstGeom>
-          <a:solidFill>
-            <a:srgbClr val="0D1B2A"/>
-          </a:solidFill>
-          <a:ln w="12700">
-            <a:solidFill>
-              <a:srgbClr val="FBBF24"/>
-            </a:solidFill>
-            <a:prstDash val="solid"/>
-          </a:ln>
-        </p:spPr>
-      </p:sp>
-      <p:sp>
-        <p:nvSpPr>
-          <p:cNvPr id="45" name="Shape 43"/>
-          <p:cNvSpPr/>
-          <p:nvPr/>
-        </p:nvSpPr>
-        <p:spPr>
-          <a:xfrm>
-            <a:off x="4648450" y="4246268"/>
-            <a:ext cx="64008" cy="475488"/>
-          </a:xfrm>
-          <a:prstGeom prst="rect">
-            <a:avLst/>
-          </a:prstGeom>
-          <a:solidFill>
-            <a:srgbClr val="FBBF24"/>
-          </a:solidFill>
-          <a:ln w="12700">
-            <a:solidFill>
-              <a:srgbClr val="FBBF24"/>
-            </a:solidFill>
-            <a:prstDash val="solid"/>
-          </a:ln>
-        </p:spPr>
-      </p:sp>
-      <p:sp>
-        <p:nvSpPr>
-          <p:cNvPr id="46" name="Text 44"/>
-          <p:cNvSpPr/>
-          <p:nvPr/>
-        </p:nvSpPr>
-        <p:spPr>
-          <a:xfrm>
-            <a:off x="4794754" y="4282844"/>
-            <a:ext cx="4041648" cy="219456"/>
-          </a:xfrm>
-          <a:prstGeom prst="rect">
-            <a:avLst/>
-          </a:prstGeom>
-          <a:noFill/>
-          <a:ln/>
-        </p:spPr>
-        <p:txBody>
-          <a:bodyPr wrap="square" lIns="0" tIns="0" rIns="0" bIns="0" rtlCol="0" anchor="ctr"/>
-          <a:lstStyle/>
-          <a:p>
-            <a:pPr marL="0" indent="0">
-              <a:buNone/>
-            </a:pPr>
-            <a:r>
-              <a:rPr lang="en-US" sz="1100" b="1" dirty="0">
-                <a:solidFill>
-                  <a:srgbClr val="FBBF24"/>
-                </a:solidFill>
-                <a:latin typeface="Calibri" pitchFamily="34" charset="0"/>
-                <a:ea typeface="Calibri" pitchFamily="34" charset="-122"/>
-                <a:cs typeface="Calibri" pitchFamily="34" charset="-120"/>
-              </a:rPr>
-              <a:t>🔗  ControlFlowExamples.md</a:t>
-            </a:r>
-            <a:endParaRPr lang="en-US" sz="1100" dirty="0"/>
-          </a:p>
-        </p:txBody>
-      </p:sp>
-      <p:sp>
-        <p:nvSpPr>
-          <p:cNvPr id="47" name="Text 45">
-            <a:hlinkClick r:id="rId3"/>
-          </p:cNvPr>
-          <p:cNvSpPr/>
-          <p:nvPr/>
-        </p:nvSpPr>
-        <p:spPr>
-          <a:xfrm>
-            <a:off x="4794754" y="4502300"/>
-            <a:ext cx="4041648" cy="182880"/>
-          </a:xfrm>
-          <a:prstGeom prst="rect">
-            <a:avLst/>
-          </a:prstGeom>
-          <a:noFill/>
-          <a:ln/>
-        </p:spPr>
-        <p:txBody>
-          <a:bodyPr wrap="square" lIns="0" tIns="0" rIns="0" bIns="0" rtlCol="0" anchor="ctr"/>
-          <a:lstStyle/>
-          <a:p>
-            <a:pPr marL="0" indent="0">
-              <a:buNone/>
-            </a:pPr>
-            <a:r>
-              <a:rPr lang="en-US" sz="750" u="sng" dirty="0">
-                <a:solidFill>
-                  <a:srgbClr val="64748B"/>
-                </a:solidFill>
-                <a:latin typeface="Calibri" pitchFamily="34" charset="0"/>
-                <a:ea typeface="Calibri" pitchFamily="34" charset="-122"/>
-                <a:cs typeface="Calibri" pitchFamily="34" charset="-120"/>
-                <a:hlinkClick r:id="rId3">
-                  <a:extLst>
-                    <a:ext uri="{A12FA001-AC4F-418D-AE19-62706E023703}">
-                      <ahyp:hlinkClr xmlns:ahyp="http://schemas.microsoft.com/office/drawing/2018/hyperlinkcolor" val="tx"/>
-                    </a:ext>
-                  </a:extLst>
-                </a:hlinkClick>
-              </a:rPr>
-              <a:t>https://github.com/reachsatyavs/python-tutorials/blob/main/ControlFlows/ControlFlowExamples.md</a:t>
-            </a:r>
-            <a:endParaRPr lang="en-US" sz="750" dirty="0"/>
+            <a:endParaRPr lang="en-US" sz="800" dirty="0"/>
           </a:p>
         </p:txBody>
       </p:sp>
@@ -5009,7 +4879,7 @@
         <p:spPr>
           <a:xfrm>
             <a:off x="0" y="0"/>
-            <a:ext cx="9144000" cy="658368"/>
+            <a:ext cx="9168448" cy="332751"/>
           </a:xfrm>
           <a:prstGeom prst="rect">
             <a:avLst/>
@@ -5034,7 +4904,7 @@
         <p:spPr>
           <a:xfrm>
             <a:off x="0" y="0"/>
-            <a:ext cx="164592" cy="658368"/>
+            <a:ext cx="165032" cy="332751"/>
           </a:xfrm>
           <a:prstGeom prst="rect">
             <a:avLst/>
@@ -5059,7 +4929,7 @@
         <p:spPr>
           <a:xfrm>
             <a:off x="292608" y="0"/>
-            <a:ext cx="8046720" cy="658368"/>
+            <a:ext cx="8068234" cy="332751"/>
           </a:xfrm>
           <a:prstGeom prst="rect">
             <a:avLst/>
@@ -5098,7 +4968,7 @@
         <p:spPr>
           <a:xfrm>
             <a:off x="8275320" y="0"/>
-            <a:ext cx="731520" cy="658368"/>
+            <a:ext cx="733476" cy="332751"/>
           </a:xfrm>
           <a:prstGeom prst="rect">
             <a:avLst/>
@@ -5136,7 +5006,7 @@
         </p:nvSpPr>
         <p:spPr>
           <a:xfrm>
-            <a:off x="0" y="4992624"/>
+            <a:off x="-51880" y="4934257"/>
             <a:ext cx="9144000" cy="27432"/>
           </a:xfrm>
           <a:prstGeom prst="rect">
@@ -5161,7 +5031,7 @@
         </p:nvSpPr>
         <p:spPr>
           <a:xfrm>
-            <a:off x="274320" y="5029200"/>
+            <a:off x="222440" y="4970833"/>
             <a:ext cx="8595360" cy="109728"/>
           </a:xfrm>
           <a:prstGeom prst="rect">
@@ -5200,8 +5070,8 @@
         </p:nvSpPr>
         <p:spPr>
           <a:xfrm>
-            <a:off x="256032" y="804672"/>
-            <a:ext cx="1828800" cy="246888"/>
+            <a:off x="204152" y="428537"/>
+            <a:ext cx="1449550" cy="169390"/>
           </a:xfrm>
           <a:prstGeom prst="rect">
             <a:avLst/>
@@ -5225,8 +5095,8 @@
         </p:nvSpPr>
         <p:spPr>
           <a:xfrm>
-            <a:off x="256032" y="804672"/>
-            <a:ext cx="1828800" cy="246888"/>
+            <a:off x="204152" y="428537"/>
+            <a:ext cx="1449550" cy="169390"/>
           </a:xfrm>
           <a:prstGeom prst="rect">
             <a:avLst/>
@@ -5264,7 +5134,7 @@
         </p:nvSpPr>
         <p:spPr>
           <a:xfrm>
-            <a:off x="256032" y="1097280"/>
+            <a:off x="204152" y="721145"/>
             <a:ext cx="4078224" cy="676656"/>
           </a:xfrm>
           <a:prstGeom prst="rect">
@@ -5285,7 +5155,7 @@
               <a:buChar char="•"/>
             </a:pPr>
             <a:r>
-              <a:rPr lang="en-US" sz="1100" dirty="0">
+              <a:rPr lang="en-US" sz="800" dirty="0">
                 <a:solidFill>
                   <a:srgbClr val="CBD5E1"/>
                 </a:solidFill>
@@ -5295,7 +5165,7 @@
               </a:rPr>
               <a:t>Repeat as long as a condition stays True</a:t>
             </a:r>
-            <a:endParaRPr lang="en-US" sz="1100" dirty="0"/>
+            <a:endParaRPr lang="en-US" sz="800" dirty="0"/>
           </a:p>
           <a:p>
             <a:pPr marL="342900" indent="-342900">
@@ -5306,7 +5176,7 @@
               <a:buChar char="•"/>
             </a:pPr>
             <a:r>
-              <a:rPr lang="en-US" sz="1100" dirty="0">
+              <a:rPr lang="en-US" sz="800" dirty="0">
                 <a:solidFill>
                   <a:srgbClr val="CBD5E1"/>
                 </a:solidFill>
@@ -5316,7 +5186,7 @@
               </a:rPr>
               <a:t>When you don't know in advance how many iterations</a:t>
             </a:r>
-            <a:endParaRPr lang="en-US" sz="1100" dirty="0"/>
+            <a:endParaRPr lang="en-US" sz="800" dirty="0"/>
           </a:p>
           <a:p>
             <a:pPr marL="342900" indent="-342900">
@@ -5327,7 +5197,7 @@
               <a:buChar char="•"/>
             </a:pPr>
             <a:r>
-              <a:rPr lang="en-US" sz="1100" dirty="0">
+              <a:rPr lang="en-US" sz="800" dirty="0">
                 <a:solidFill>
                   <a:srgbClr val="CBD5E1"/>
                 </a:solidFill>
@@ -5337,7 +5207,7 @@
               </a:rPr>
               <a:t>Polling, retrying, waiting for user input</a:t>
             </a:r>
-            <a:endParaRPr lang="en-US" sz="1100" dirty="0"/>
+            <a:endParaRPr lang="en-US" sz="800" dirty="0"/>
           </a:p>
           <a:p>
             <a:pPr marL="342900" indent="-342900">
@@ -5345,7 +5215,7 @@
               <a:buChar char="•"/>
             </a:pPr>
             <a:r>
-              <a:rPr lang="en-US" sz="1100" dirty="0">
+              <a:rPr lang="en-US" sz="800" dirty="0">
                 <a:solidFill>
                   <a:srgbClr val="CBD5E1"/>
                 </a:solidFill>
@@ -5355,7 +5225,7 @@
               </a:rPr>
               <a:t>Game loops, server loops, event-driven programs</a:t>
             </a:r>
-            <a:endParaRPr lang="en-US" sz="1100" dirty="0"/>
+            <a:endParaRPr lang="en-US" sz="800" dirty="0"/>
           </a:p>
         </p:txBody>
       </p:sp>
@@ -5367,8 +5237,8 @@
         </p:nvSpPr>
         <p:spPr>
           <a:xfrm>
-            <a:off x="256032" y="1837944"/>
-            <a:ext cx="1371600" cy="246888"/>
+            <a:off x="204152" y="1429384"/>
+            <a:ext cx="1112325" cy="169390"/>
           </a:xfrm>
           <a:prstGeom prst="rect">
             <a:avLst/>
@@ -5392,8 +5262,8 @@
         </p:nvSpPr>
         <p:spPr>
           <a:xfrm>
-            <a:off x="256032" y="1837944"/>
-            <a:ext cx="1371600" cy="246888"/>
+            <a:off x="204152" y="1429384"/>
+            <a:ext cx="1112325" cy="169390"/>
           </a:xfrm>
           <a:prstGeom prst="rect">
             <a:avLst/>
@@ -5431,8 +5301,8 @@
         </p:nvSpPr>
         <p:spPr>
           <a:xfrm>
-            <a:off x="256032" y="2121408"/>
-            <a:ext cx="4078224" cy="969264"/>
+            <a:off x="192761" y="1640343"/>
+            <a:ext cx="4078224" cy="1246548"/>
           </a:xfrm>
           <a:prstGeom prst="rect">
             <a:avLst/>
@@ -5456,8 +5326,8 @@
         </p:nvSpPr>
         <p:spPr>
           <a:xfrm>
-            <a:off x="384048" y="2212848"/>
-            <a:ext cx="3822192" cy="786384"/>
+            <a:off x="247328" y="1620515"/>
+            <a:ext cx="3904488" cy="886968"/>
           </a:xfrm>
           <a:prstGeom prst="rect">
             <a:avLst/>
@@ -5473,7 +5343,7 @@
               <a:buNone/>
             </a:pPr>
             <a:r>
-              <a:rPr lang="en-US" sz="980" dirty="0">
+              <a:rPr lang="en-US" sz="800" dirty="0">
                 <a:solidFill>
                   <a:srgbClr val="7DD3FC"/>
                 </a:solidFill>
@@ -5483,14 +5353,14 @@
               </a:rPr>
               <a:t>while condition:</a:t>
             </a:r>
-            <a:endParaRPr lang="en-US" sz="980" dirty="0"/>
-          </a:p>
-          <a:p>
-            <a:pPr marL="0" indent="0">
-              <a:buNone/>
-            </a:pPr>
-            <a:r>
-              <a:rPr lang="en-US" sz="980" dirty="0">
+            <a:endParaRPr lang="en-US" sz="800" dirty="0"/>
+          </a:p>
+          <a:p>
+            <a:pPr marL="0" indent="0">
+              <a:buNone/>
+            </a:pPr>
+            <a:r>
+              <a:rPr lang="en-US" sz="800" dirty="0">
                 <a:solidFill>
                   <a:srgbClr val="7DD3FC"/>
                 </a:solidFill>
@@ -5500,14 +5370,14 @@
               </a:rPr>
               <a:t>    # body — runs while condition is True</a:t>
             </a:r>
-            <a:endParaRPr lang="en-US" sz="980" dirty="0"/>
-          </a:p>
-          <a:p>
-            <a:pPr marL="0" indent="0">
-              <a:buNone/>
-            </a:pPr>
-            <a:r>
-              <a:rPr lang="en-US" sz="980" dirty="0">
+            <a:endParaRPr lang="en-US" sz="800" dirty="0"/>
+          </a:p>
+          <a:p>
+            <a:pPr marL="0" indent="0">
+              <a:buNone/>
+            </a:pPr>
+            <a:r>
+              <a:rPr lang="en-US" sz="800" dirty="0">
                 <a:solidFill>
                   <a:srgbClr val="7DD3FC"/>
                 </a:solidFill>
@@ -5517,14 +5387,14 @@
               </a:rPr>
               <a:t>    # ALWAYS update something so condition</a:t>
             </a:r>
-            <a:endParaRPr lang="en-US" sz="980" dirty="0"/>
-          </a:p>
-          <a:p>
-            <a:pPr marL="0" indent="0">
-              <a:buNone/>
-            </a:pPr>
-            <a:r>
-              <a:rPr lang="en-US" sz="980" dirty="0">
+            <a:endParaRPr lang="en-US" sz="800" dirty="0"/>
+          </a:p>
+          <a:p>
+            <a:pPr marL="0" indent="0">
+              <a:buNone/>
+            </a:pPr>
+            <a:r>
+              <a:rPr lang="en-US" sz="800" dirty="0">
                 <a:solidFill>
                   <a:srgbClr val="7DD3FC"/>
                 </a:solidFill>
@@ -5534,20 +5404,20 @@
               </a:rPr>
               <a:t>    # eventually becomes False!</a:t>
             </a:r>
-            <a:endParaRPr lang="en-US" sz="980" dirty="0"/>
-          </a:p>
-          <a:p>
-            <a:pPr marL="0" indent="0">
-              <a:buNone/>
-            </a:pPr>
-            <a:endParaRPr lang="en-US" sz="980" dirty="0"/>
-          </a:p>
-          <a:p>
-            <a:pPr marL="0" indent="0">
-              <a:buNone/>
-            </a:pPr>
-            <a:r>
-              <a:rPr lang="en-US" sz="980" dirty="0">
+            <a:endParaRPr lang="en-US" sz="800" dirty="0"/>
+          </a:p>
+          <a:p>
+            <a:pPr marL="0" indent="0">
+              <a:buNone/>
+            </a:pPr>
+            <a:endParaRPr lang="en-US" sz="800" dirty="0"/>
+          </a:p>
+          <a:p>
+            <a:pPr marL="0" indent="0">
+              <a:buNone/>
+            </a:pPr>
+            <a:r>
+              <a:rPr lang="en-US" sz="800" dirty="0">
                 <a:solidFill>
                   <a:srgbClr val="7DD3FC"/>
                 </a:solidFill>
@@ -5557,14 +5427,14 @@
               </a:rPr>
               <a:t># Optional else — runs after loop exits normally</a:t>
             </a:r>
-            <a:endParaRPr lang="en-US" sz="980" dirty="0"/>
-          </a:p>
-          <a:p>
-            <a:pPr marL="0" indent="0">
-              <a:buNone/>
-            </a:pPr>
-            <a:r>
-              <a:rPr lang="en-US" sz="980" dirty="0">
+            <a:endParaRPr lang="en-US" sz="800" dirty="0"/>
+          </a:p>
+          <a:p>
+            <a:pPr marL="0" indent="0">
+              <a:buNone/>
+            </a:pPr>
+            <a:r>
+              <a:rPr lang="en-US" sz="800" dirty="0">
                 <a:solidFill>
                   <a:srgbClr val="7DD3FC"/>
                 </a:solidFill>
@@ -5574,14 +5444,14 @@
               </a:rPr>
               <a:t>while condition:</a:t>
             </a:r>
-            <a:endParaRPr lang="en-US" sz="980" dirty="0"/>
-          </a:p>
-          <a:p>
-            <a:pPr marL="0" indent="0">
-              <a:buNone/>
-            </a:pPr>
-            <a:r>
-              <a:rPr lang="en-US" sz="980" dirty="0">
+            <a:endParaRPr lang="en-US" sz="800" dirty="0"/>
+          </a:p>
+          <a:p>
+            <a:pPr marL="0" indent="0">
+              <a:buNone/>
+            </a:pPr>
+            <a:r>
+              <a:rPr lang="en-US" sz="800" dirty="0">
                 <a:solidFill>
                   <a:srgbClr val="7DD3FC"/>
                 </a:solidFill>
@@ -5591,14 +5461,14 @@
               </a:rPr>
               <a:t>    ...</a:t>
             </a:r>
-            <a:endParaRPr lang="en-US" sz="980" dirty="0"/>
-          </a:p>
-          <a:p>
-            <a:pPr marL="0" indent="0">
-              <a:buNone/>
-            </a:pPr>
-            <a:r>
-              <a:rPr lang="en-US" sz="980" dirty="0">
+            <a:endParaRPr lang="en-US" sz="800" dirty="0"/>
+          </a:p>
+          <a:p>
+            <a:pPr marL="0" indent="0">
+              <a:buNone/>
+            </a:pPr>
+            <a:r>
+              <a:rPr lang="en-US" sz="800" dirty="0">
                 <a:solidFill>
                   <a:srgbClr val="7DD3FC"/>
                 </a:solidFill>
@@ -5608,14 +5478,14 @@
               </a:rPr>
               <a:t>else:</a:t>
             </a:r>
-            <a:endParaRPr lang="en-US" sz="980" dirty="0"/>
-          </a:p>
-          <a:p>
-            <a:pPr marL="0" indent="0">
-              <a:buNone/>
-            </a:pPr>
-            <a:r>
-              <a:rPr lang="en-US" sz="980" dirty="0">
+            <a:endParaRPr lang="en-US" sz="800" dirty="0"/>
+          </a:p>
+          <a:p>
+            <a:pPr marL="0" indent="0">
+              <a:buNone/>
+            </a:pPr>
+            <a:r>
+              <a:rPr lang="en-US" sz="800" dirty="0">
                 <a:solidFill>
                   <a:srgbClr val="7DD3FC"/>
                 </a:solidFill>
@@ -5625,7 +5495,7 @@
               </a:rPr>
               <a:t>    print("Loop finished without break")</a:t>
             </a:r>
-            <a:endParaRPr lang="en-US" sz="980" dirty="0"/>
+            <a:endParaRPr lang="en-US" sz="800" dirty="0"/>
           </a:p>
         </p:txBody>
       </p:sp>
@@ -5637,8 +5507,8 @@
         </p:nvSpPr>
         <p:spPr>
           <a:xfrm>
-            <a:off x="256032" y="3145536"/>
-            <a:ext cx="1371600" cy="246888"/>
+            <a:off x="204152" y="2957466"/>
+            <a:ext cx="1079576" cy="146403"/>
           </a:xfrm>
           <a:prstGeom prst="rect">
             <a:avLst/>
@@ -5662,8 +5532,8 @@
         </p:nvSpPr>
         <p:spPr>
           <a:xfrm>
-            <a:off x="256032" y="3145536"/>
-            <a:ext cx="1371600" cy="246888"/>
+            <a:off x="204152" y="2957466"/>
+            <a:ext cx="1079576" cy="146403"/>
           </a:xfrm>
           <a:prstGeom prst="rect">
             <a:avLst/>
@@ -5679,7 +5549,7 @@
               <a:buNone/>
             </a:pPr>
             <a:r>
-              <a:rPr lang="en-US" sz="850" b="1" dirty="0">
+              <a:rPr lang="en-US" sz="800" b="1" dirty="0">
                 <a:solidFill>
                   <a:srgbClr val="0F172A"/>
                 </a:solidFill>
@@ -5689,7 +5559,7 @@
               </a:rPr>
               <a:t>KEY RULES</a:t>
             </a:r>
-            <a:endParaRPr lang="en-US" sz="850" dirty="0"/>
+            <a:endParaRPr lang="en-US" sz="800" dirty="0"/>
           </a:p>
         </p:txBody>
       </p:sp>
@@ -5701,8 +5571,8 @@
         </p:nvSpPr>
         <p:spPr>
           <a:xfrm>
-            <a:off x="256032" y="3438144"/>
-            <a:ext cx="1304544" cy="246888"/>
+            <a:off x="1764402" y="2964986"/>
+            <a:ext cx="1744039" cy="226171"/>
           </a:xfrm>
           <a:prstGeom prst="rect">
             <a:avLst/>
@@ -5726,8 +5596,8 @@
         </p:nvSpPr>
         <p:spPr>
           <a:xfrm>
-            <a:off x="256032" y="3438144"/>
-            <a:ext cx="1304544" cy="246888"/>
+            <a:off x="1776657" y="2962297"/>
+            <a:ext cx="1588946" cy="213457"/>
           </a:xfrm>
           <a:prstGeom prst="rect">
             <a:avLst/>
@@ -5743,7 +5613,7 @@
               <a:buNone/>
             </a:pPr>
             <a:r>
-              <a:rPr lang="en-US" sz="900" dirty="0">
+              <a:rPr lang="en-US" sz="800" dirty="0">
                 <a:solidFill>
                   <a:srgbClr val="A78BFA"/>
                 </a:solidFill>
@@ -5753,7 +5623,7 @@
               </a:rPr>
               <a:t>Condition checked BEFORE each iteration</a:t>
             </a:r>
-            <a:endParaRPr lang="en-US" sz="900" dirty="0"/>
+            <a:endParaRPr lang="en-US" sz="800" dirty="0"/>
           </a:p>
         </p:txBody>
       </p:sp>
@@ -5765,8 +5635,8 @@
         </p:nvSpPr>
         <p:spPr>
           <a:xfrm>
-            <a:off x="1624584" y="3438144"/>
-            <a:ext cx="1304544" cy="246888"/>
+            <a:off x="210834" y="3211164"/>
+            <a:ext cx="1490927" cy="227030"/>
           </a:xfrm>
           <a:prstGeom prst="rect">
             <a:avLst/>
@@ -5790,8 +5660,8 @@
         </p:nvSpPr>
         <p:spPr>
           <a:xfrm>
-            <a:off x="1624584" y="3438144"/>
-            <a:ext cx="1304544" cy="246888"/>
+            <a:off x="210834" y="3211164"/>
+            <a:ext cx="1490927" cy="237744"/>
           </a:xfrm>
           <a:prstGeom prst="rect">
             <a:avLst/>
@@ -5807,7 +5677,7 @@
               <a:buNone/>
             </a:pPr>
             <a:r>
-              <a:rPr lang="en-US" sz="900" dirty="0">
+              <a:rPr lang="en-US" sz="800" dirty="0">
                 <a:solidFill>
                   <a:srgbClr val="A78BFA"/>
                 </a:solidFill>
@@ -5817,7 +5687,7 @@
               </a:rPr>
               <a:t>Must update state inside loop</a:t>
             </a:r>
-            <a:endParaRPr lang="en-US" sz="900" dirty="0"/>
+            <a:endParaRPr lang="en-US" sz="800" dirty="0"/>
           </a:p>
         </p:txBody>
       </p:sp>
@@ -5829,8 +5699,8 @@
         </p:nvSpPr>
         <p:spPr>
           <a:xfrm>
-            <a:off x="2993136" y="3438144"/>
-            <a:ext cx="1304544" cy="246888"/>
+            <a:off x="1758118" y="3211164"/>
+            <a:ext cx="1754677" cy="234003"/>
           </a:xfrm>
           <a:prstGeom prst="rect">
             <a:avLst/>
@@ -5854,8 +5724,8 @@
         </p:nvSpPr>
         <p:spPr>
           <a:xfrm>
-            <a:off x="2993136" y="3438144"/>
-            <a:ext cx="1304544" cy="246888"/>
+            <a:off x="1758119" y="3211164"/>
+            <a:ext cx="1744038" cy="191798"/>
           </a:xfrm>
           <a:prstGeom prst="rect">
             <a:avLst/>
@@ -5871,7 +5741,7 @@
               <a:buNone/>
             </a:pPr>
             <a:r>
-              <a:rPr lang="en-US" sz="900" dirty="0">
+              <a:rPr lang="en-US" sz="800" dirty="0">
                 <a:solidFill>
                   <a:srgbClr val="A78BFA"/>
                 </a:solidFill>
@@ -5881,7 +5751,7 @@
               </a:rPr>
               <a:t>Infinite loop if condition never False</a:t>
             </a:r>
-            <a:endParaRPr lang="en-US" sz="900" dirty="0"/>
+            <a:endParaRPr lang="en-US" sz="800" dirty="0"/>
           </a:p>
         </p:txBody>
       </p:sp>
@@ -5893,8 +5763,8 @@
         </p:nvSpPr>
         <p:spPr>
           <a:xfrm>
-            <a:off x="256032" y="3730752"/>
-            <a:ext cx="1304544" cy="246888"/>
+            <a:off x="204152" y="3458377"/>
+            <a:ext cx="1490927" cy="191798"/>
           </a:xfrm>
           <a:prstGeom prst="rect">
             <a:avLst/>
@@ -5918,8 +5788,8 @@
         </p:nvSpPr>
         <p:spPr>
           <a:xfrm>
-            <a:off x="256032" y="3730752"/>
-            <a:ext cx="1304544" cy="246888"/>
+            <a:off x="204152" y="3471347"/>
+            <a:ext cx="1490927" cy="191798"/>
           </a:xfrm>
           <a:prstGeom prst="rect">
             <a:avLst/>
@@ -5935,7 +5805,7 @@
               <a:buNone/>
             </a:pPr>
             <a:r>
-              <a:rPr lang="en-US" sz="900" dirty="0">
+              <a:rPr lang="en-US" sz="800" dirty="0">
                 <a:solidFill>
                   <a:srgbClr val="A78BFA"/>
                 </a:solidFill>
@@ -5945,7 +5815,7 @@
               </a:rPr>
               <a:t>break exits immediately</a:t>
             </a:r>
-            <a:endParaRPr lang="en-US" sz="900" dirty="0"/>
+            <a:endParaRPr lang="en-US" sz="800" dirty="0"/>
           </a:p>
         </p:txBody>
       </p:sp>
@@ -5957,8 +5827,8 @@
         </p:nvSpPr>
         <p:spPr>
           <a:xfrm>
-            <a:off x="1624584" y="3730752"/>
-            <a:ext cx="1304544" cy="246888"/>
+            <a:off x="1767254" y="3477832"/>
+            <a:ext cx="1745541" cy="191798"/>
           </a:xfrm>
           <a:prstGeom prst="rect">
             <a:avLst/>
@@ -5982,8 +5852,8 @@
         </p:nvSpPr>
         <p:spPr>
           <a:xfrm>
-            <a:off x="1624584" y="3730752"/>
-            <a:ext cx="1304544" cy="246888"/>
+            <a:off x="1767254" y="3477832"/>
+            <a:ext cx="1490927" cy="191798"/>
           </a:xfrm>
           <a:prstGeom prst="rect">
             <a:avLst/>
@@ -5999,7 +5869,7 @@
               <a:buNone/>
             </a:pPr>
             <a:r>
-              <a:rPr lang="en-US" sz="900" dirty="0">
+              <a:rPr lang="en-US" sz="800" dirty="0">
                 <a:solidFill>
                   <a:srgbClr val="A78BFA"/>
                 </a:solidFill>
@@ -6009,7 +5879,7 @@
               </a:rPr>
               <a:t>else runs if no break</a:t>
             </a:r>
-            <a:endParaRPr lang="en-US" sz="900" dirty="0"/>
+            <a:endParaRPr lang="en-US" sz="800" dirty="0"/>
           </a:p>
         </p:txBody>
       </p:sp>
@@ -6021,8 +5891,8 @@
         </p:nvSpPr>
         <p:spPr>
           <a:xfrm>
-            <a:off x="256032" y="4005072"/>
-            <a:ext cx="1828800" cy="246888"/>
+            <a:off x="187796" y="3697565"/>
+            <a:ext cx="1258059" cy="191798"/>
           </a:xfrm>
           <a:prstGeom prst="rect">
             <a:avLst/>
@@ -6046,8 +5916,8 @@
         </p:nvSpPr>
         <p:spPr>
           <a:xfrm>
-            <a:off x="256032" y="4005072"/>
-            <a:ext cx="1828800" cy="246888"/>
+            <a:off x="187796" y="3697565"/>
+            <a:ext cx="1258059" cy="191798"/>
           </a:xfrm>
           <a:prstGeom prst="rect">
             <a:avLst/>
@@ -6063,7 +5933,7 @@
               <a:buNone/>
             </a:pPr>
             <a:r>
-              <a:rPr lang="en-US" sz="850" b="1" dirty="0">
+              <a:rPr lang="en-US" sz="800" b="1" dirty="0">
                 <a:solidFill>
                   <a:srgbClr val="0F172A"/>
                 </a:solidFill>
@@ -6073,7 +5943,7 @@
               </a:rPr>
               <a:t>CODE EXAMPLE</a:t>
             </a:r>
-            <a:endParaRPr lang="en-US" sz="850" dirty="0"/>
+            <a:endParaRPr lang="en-US" sz="800" dirty="0"/>
           </a:p>
         </p:txBody>
       </p:sp>
@@ -6085,8 +5955,8 @@
         </p:nvSpPr>
         <p:spPr>
           <a:xfrm>
-            <a:off x="256032" y="4279392"/>
-            <a:ext cx="4078224" cy="658368"/>
+            <a:off x="174177" y="3934987"/>
+            <a:ext cx="4050789" cy="971837"/>
           </a:xfrm>
           <a:prstGeom prst="rect">
             <a:avLst/>
@@ -6110,7 +5980,7 @@
         </p:nvSpPr>
         <p:spPr>
           <a:xfrm>
-            <a:off x="384048" y="4370832"/>
+            <a:off x="247328" y="4092654"/>
             <a:ext cx="3822192" cy="475488"/>
           </a:xfrm>
           <a:prstGeom prst="rect">
@@ -6127,7 +5997,7 @@
               <a:buNone/>
             </a:pPr>
             <a:r>
-              <a:rPr lang="en-US" sz="980" dirty="0">
+              <a:rPr lang="en-US" sz="800" dirty="0">
                 <a:solidFill>
                   <a:srgbClr val="7DD3FC"/>
                 </a:solidFill>
@@ -6137,14 +6007,14 @@
               </a:rPr>
               <a:t># Count down from 5</a:t>
             </a:r>
-            <a:endParaRPr lang="en-US" sz="980" dirty="0"/>
-          </a:p>
-          <a:p>
-            <a:pPr marL="0" indent="0">
-              <a:buNone/>
-            </a:pPr>
-            <a:r>
-              <a:rPr lang="en-US" sz="980" dirty="0">
+            <a:endParaRPr lang="en-US" sz="800" dirty="0"/>
+          </a:p>
+          <a:p>
+            <a:pPr marL="0" indent="0">
+              <a:buNone/>
+            </a:pPr>
+            <a:r>
+              <a:rPr lang="en-US" sz="800" dirty="0">
                 <a:solidFill>
                   <a:srgbClr val="7DD3FC"/>
                 </a:solidFill>
@@ -6154,14 +6024,14 @@
               </a:rPr>
               <a:t>i = 5</a:t>
             </a:r>
-            <a:endParaRPr lang="en-US" sz="980" dirty="0"/>
-          </a:p>
-          <a:p>
-            <a:pPr marL="0" indent="0">
-              <a:buNone/>
-            </a:pPr>
-            <a:r>
-              <a:rPr lang="en-US" sz="980" dirty="0">
+            <a:endParaRPr lang="en-US" sz="800" dirty="0"/>
+          </a:p>
+          <a:p>
+            <a:pPr marL="0" indent="0">
+              <a:buNone/>
+            </a:pPr>
+            <a:r>
+              <a:rPr lang="en-US" sz="800" dirty="0">
                 <a:solidFill>
                   <a:srgbClr val="7DD3FC"/>
                 </a:solidFill>
@@ -6171,14 +6041,14 @@
               </a:rPr>
               <a:t>while i &gt; 0:</a:t>
             </a:r>
-            <a:endParaRPr lang="en-US" sz="980" dirty="0"/>
-          </a:p>
-          <a:p>
-            <a:pPr marL="0" indent="0">
-              <a:buNone/>
-            </a:pPr>
-            <a:r>
-              <a:rPr lang="en-US" sz="980" dirty="0">
+            <a:endParaRPr lang="en-US" sz="800" dirty="0"/>
+          </a:p>
+          <a:p>
+            <a:pPr marL="0" indent="0">
+              <a:buNone/>
+            </a:pPr>
+            <a:r>
+              <a:rPr lang="en-US" sz="800" dirty="0">
                 <a:solidFill>
                   <a:srgbClr val="7DD3FC"/>
                 </a:solidFill>
@@ -6188,14 +6058,14 @@
               </a:rPr>
               <a:t>    print(i)</a:t>
             </a:r>
-            <a:endParaRPr lang="en-US" sz="980" dirty="0"/>
-          </a:p>
-          <a:p>
-            <a:pPr marL="0" indent="0">
-              <a:buNone/>
-            </a:pPr>
-            <a:r>
-              <a:rPr lang="en-US" sz="980" dirty="0">
+            <a:endParaRPr lang="en-US" sz="800" dirty="0"/>
+          </a:p>
+          <a:p>
+            <a:pPr marL="0" indent="0">
+              <a:buNone/>
+            </a:pPr>
+            <a:r>
+              <a:rPr lang="en-US" sz="800" dirty="0">
                 <a:solidFill>
                   <a:srgbClr val="7DD3FC"/>
                 </a:solidFill>
@@ -6205,14 +6075,14 @@
               </a:rPr>
               <a:t>    i -= 1          # IMPORTANT: update i!</a:t>
             </a:r>
-            <a:endParaRPr lang="en-US" sz="980" dirty="0"/>
-          </a:p>
-          <a:p>
-            <a:pPr marL="0" indent="0">
-              <a:buNone/>
-            </a:pPr>
-            <a:r>
-              <a:rPr lang="en-US" sz="980" dirty="0">
+            <a:endParaRPr lang="en-US" sz="800" dirty="0"/>
+          </a:p>
+          <a:p>
+            <a:pPr marL="0" indent="0">
+              <a:buNone/>
+            </a:pPr>
+            <a:r>
+              <a:rPr lang="en-US" sz="800" dirty="0">
                 <a:solidFill>
                   <a:srgbClr val="7DD3FC"/>
                 </a:solidFill>
@@ -6222,7 +6092,7 @@
               </a:rPr>
               <a:t>print("Liftoff!")  # runs after loop</a:t>
             </a:r>
-            <a:endParaRPr lang="en-US" sz="980" dirty="0"/>
+            <a:endParaRPr lang="en-US" sz="800" dirty="0"/>
           </a:p>
         </p:txBody>
       </p:sp>
@@ -6234,8 +6104,8 @@
         </p:nvSpPr>
         <p:spPr>
           <a:xfrm>
-            <a:off x="4462272" y="804672"/>
-            <a:ext cx="27432" cy="4133088"/>
+            <a:off x="4410391" y="428537"/>
+            <a:ext cx="45719" cy="4398264"/>
           </a:xfrm>
           <a:prstGeom prst="rect">
             <a:avLst/>
@@ -6259,8 +6129,8 @@
         </p:nvSpPr>
         <p:spPr>
           <a:xfrm>
-            <a:off x="4663440" y="804672"/>
-            <a:ext cx="2926080" cy="246888"/>
+            <a:off x="4572000" y="142830"/>
+            <a:ext cx="2926080" cy="168628"/>
           </a:xfrm>
           <a:prstGeom prst="rect">
             <a:avLst/>
@@ -6284,8 +6154,8 @@
         </p:nvSpPr>
         <p:spPr>
           <a:xfrm>
-            <a:off x="4663440" y="804672"/>
-            <a:ext cx="2926080" cy="246888"/>
+            <a:off x="4572000" y="142830"/>
+            <a:ext cx="2926080" cy="168628"/>
           </a:xfrm>
           <a:prstGeom prst="rect">
             <a:avLst/>
@@ -6323,8 +6193,8 @@
         </p:nvSpPr>
         <p:spPr>
           <a:xfrm>
-            <a:off x="4663440" y="1078992"/>
-            <a:ext cx="4224528" cy="1335024"/>
+            <a:off x="4577059" y="344850"/>
+            <a:ext cx="4310909" cy="1784025"/>
           </a:xfrm>
           <a:prstGeom prst="rect">
             <a:avLst/>
@@ -6348,8 +6218,8 @@
         </p:nvSpPr>
         <p:spPr>
           <a:xfrm>
-            <a:off x="4791456" y="1170432"/>
-            <a:ext cx="3968496" cy="1152144"/>
+            <a:off x="4591455" y="358692"/>
+            <a:ext cx="3968496" cy="1497344"/>
           </a:xfrm>
           <a:prstGeom prst="rect">
             <a:avLst/>
@@ -6365,7 +6235,7 @@
               <a:buNone/>
             </a:pPr>
             <a:r>
-              <a:rPr lang="en-US" sz="980" dirty="0">
+              <a:rPr lang="en-US" sz="800" dirty="0">
                 <a:solidFill>
                   <a:srgbClr val="7DD3FC"/>
                 </a:solidFill>
@@ -6375,14 +6245,14 @@
               </a:rPr>
               <a:t>attempts = 0</a:t>
             </a:r>
-            <a:endParaRPr lang="en-US" sz="980" dirty="0"/>
-          </a:p>
-          <a:p>
-            <a:pPr marL="0" indent="0">
-              <a:buNone/>
-            </a:pPr>
-            <a:r>
-              <a:rPr lang="en-US" sz="980" dirty="0">
+            <a:endParaRPr lang="en-US" sz="800" dirty="0"/>
+          </a:p>
+          <a:p>
+            <a:pPr marL="0" indent="0">
+              <a:buNone/>
+            </a:pPr>
+            <a:r>
+              <a:rPr lang="en-US" sz="800" dirty="0">
                 <a:solidFill>
                   <a:srgbClr val="7DD3FC"/>
                 </a:solidFill>
@@ -6392,14 +6262,14 @@
               </a:rPr>
               <a:t>max_attempts = 3</a:t>
             </a:r>
-            <a:endParaRPr lang="en-US" sz="980" dirty="0"/>
-          </a:p>
-          <a:p>
-            <a:pPr marL="0" indent="0">
-              <a:buNone/>
-            </a:pPr>
-            <a:r>
-              <a:rPr lang="en-US" sz="980" dirty="0">
+            <a:endParaRPr lang="en-US" sz="800" dirty="0"/>
+          </a:p>
+          <a:p>
+            <a:pPr marL="0" indent="0">
+              <a:buNone/>
+            </a:pPr>
+            <a:r>
+              <a:rPr lang="en-US" sz="800" dirty="0">
                 <a:solidFill>
                   <a:srgbClr val="7DD3FC"/>
                 </a:solidFill>
@@ -6409,20 +6279,20 @@
               </a:rPr>
               <a:t>success = False</a:t>
             </a:r>
-            <a:endParaRPr lang="en-US" sz="980" dirty="0"/>
-          </a:p>
-          <a:p>
-            <a:pPr marL="0" indent="0">
-              <a:buNone/>
-            </a:pPr>
-            <a:endParaRPr lang="en-US" sz="980" dirty="0"/>
-          </a:p>
-          <a:p>
-            <a:pPr marL="0" indent="0">
-              <a:buNone/>
-            </a:pPr>
-            <a:r>
-              <a:rPr lang="en-US" sz="980" dirty="0">
+            <a:endParaRPr lang="en-US" sz="800" dirty="0"/>
+          </a:p>
+          <a:p>
+            <a:pPr marL="0" indent="0">
+              <a:buNone/>
+            </a:pPr>
+            <a:endParaRPr lang="en-US" sz="800" dirty="0"/>
+          </a:p>
+          <a:p>
+            <a:pPr marL="0" indent="0">
+              <a:buNone/>
+            </a:pPr>
+            <a:r>
+              <a:rPr lang="en-US" sz="800" dirty="0">
                 <a:solidFill>
                   <a:srgbClr val="7DD3FC"/>
                 </a:solidFill>
@@ -6432,14 +6302,14 @@
               </a:rPr>
               <a:t>while attempts &lt; max_attempts and not success:</a:t>
             </a:r>
-            <a:endParaRPr lang="en-US" sz="980" dirty="0"/>
-          </a:p>
-          <a:p>
-            <a:pPr marL="0" indent="0">
-              <a:buNone/>
-            </a:pPr>
-            <a:r>
-              <a:rPr lang="en-US" sz="980" dirty="0">
+            <a:endParaRPr lang="en-US" sz="800" dirty="0"/>
+          </a:p>
+          <a:p>
+            <a:pPr marL="0" indent="0">
+              <a:buNone/>
+            </a:pPr>
+            <a:r>
+              <a:rPr lang="en-US" sz="800" dirty="0">
                 <a:solidFill>
                   <a:srgbClr val="7DD3FC"/>
                 </a:solidFill>
@@ -6449,14 +6319,14 @@
               </a:rPr>
               <a:t>    attempts += 1</a:t>
             </a:r>
-            <a:endParaRPr lang="en-US" sz="980" dirty="0"/>
-          </a:p>
-          <a:p>
-            <a:pPr marL="0" indent="0">
-              <a:buNone/>
-            </a:pPr>
-            <a:r>
-              <a:rPr lang="en-US" sz="980" dirty="0">
+            <a:endParaRPr lang="en-US" sz="800" dirty="0"/>
+          </a:p>
+          <a:p>
+            <a:pPr marL="0" indent="0">
+              <a:buNone/>
+            </a:pPr>
+            <a:r>
+              <a:rPr lang="en-US" sz="800" dirty="0">
                 <a:solidFill>
                   <a:srgbClr val="7DD3FC"/>
                 </a:solidFill>
@@ -6466,14 +6336,14 @@
               </a:rPr>
               <a:t>    print(f"Attempt {attempts}...")</a:t>
             </a:r>
-            <a:endParaRPr lang="en-US" sz="980" dirty="0"/>
-          </a:p>
-          <a:p>
-            <a:pPr marL="0" indent="0">
-              <a:buNone/>
-            </a:pPr>
-            <a:r>
-              <a:rPr lang="en-US" sz="980" dirty="0">
+            <a:endParaRPr lang="en-US" sz="800" dirty="0"/>
+          </a:p>
+          <a:p>
+            <a:pPr marL="0" indent="0">
+              <a:buNone/>
+            </a:pPr>
+            <a:r>
+              <a:rPr lang="en-US" sz="800" dirty="0">
                 <a:solidFill>
                   <a:srgbClr val="7DD3FC"/>
                 </a:solidFill>
@@ -6483,14 +6353,14 @@
               </a:rPr>
               <a:t>    # Simulate: succeed on 3rd try</a:t>
             </a:r>
-            <a:endParaRPr lang="en-US" sz="980" dirty="0"/>
-          </a:p>
-          <a:p>
-            <a:pPr marL="0" indent="0">
-              <a:buNone/>
-            </a:pPr>
-            <a:r>
-              <a:rPr lang="en-US" sz="980" dirty="0">
+            <a:endParaRPr lang="en-US" sz="800" dirty="0"/>
+          </a:p>
+          <a:p>
+            <a:pPr marL="0" indent="0">
+              <a:buNone/>
+            </a:pPr>
+            <a:r>
+              <a:rPr lang="en-US" sz="800" dirty="0">
                 <a:solidFill>
                   <a:srgbClr val="7DD3FC"/>
                 </a:solidFill>
@@ -6500,14 +6370,14 @@
               </a:rPr>
               <a:t>    if attempts == 3:</a:t>
             </a:r>
-            <a:endParaRPr lang="en-US" sz="980" dirty="0"/>
-          </a:p>
-          <a:p>
-            <a:pPr marL="0" indent="0">
-              <a:buNone/>
-            </a:pPr>
-            <a:r>
-              <a:rPr lang="en-US" sz="980" dirty="0">
+            <a:endParaRPr lang="en-US" sz="800" dirty="0"/>
+          </a:p>
+          <a:p>
+            <a:pPr marL="0" indent="0">
+              <a:buNone/>
+            </a:pPr>
+            <a:r>
+              <a:rPr lang="en-US" sz="800" dirty="0">
                 <a:solidFill>
                   <a:srgbClr val="7DD3FC"/>
                 </a:solidFill>
@@ -6517,20 +6387,14 @@
               </a:rPr>
               <a:t>        success = True</a:t>
             </a:r>
-            <a:endParaRPr lang="en-US" sz="980" dirty="0"/>
-          </a:p>
-          <a:p>
-            <a:pPr marL="0" indent="0">
-              <a:buNone/>
-            </a:pPr>
-            <a:endParaRPr lang="en-US" sz="980" dirty="0"/>
-          </a:p>
-          <a:p>
-            <a:pPr marL="0" indent="0">
-              <a:buNone/>
-            </a:pPr>
-            <a:r>
-              <a:rPr lang="en-US" sz="980" dirty="0">
+            <a:endParaRPr lang="en-US" sz="800" dirty="0"/>
+          </a:p>
+          <a:p>
+            <a:pPr marL="0" indent="0">
+              <a:buNone/>
+            </a:pPr>
+            <a:r>
+              <a:rPr lang="en-US" sz="800" dirty="0">
                 <a:solidFill>
                   <a:srgbClr val="7DD3FC"/>
                 </a:solidFill>
@@ -6540,14 +6404,14 @@
               </a:rPr>
               <a:t>if success:</a:t>
             </a:r>
-            <a:endParaRPr lang="en-US" sz="980" dirty="0"/>
-          </a:p>
-          <a:p>
-            <a:pPr marL="0" indent="0">
-              <a:buNone/>
-            </a:pPr>
-            <a:r>
-              <a:rPr lang="en-US" sz="980" dirty="0">
+            <a:endParaRPr lang="en-US" sz="800" dirty="0"/>
+          </a:p>
+          <a:p>
+            <a:pPr marL="0" indent="0">
+              <a:buNone/>
+            </a:pPr>
+            <a:r>
+              <a:rPr lang="en-US" sz="800" dirty="0">
                 <a:solidFill>
                   <a:srgbClr val="7DD3FC"/>
                 </a:solidFill>
@@ -6557,14 +6421,14 @@
               </a:rPr>
               <a:t>    print("Connected!")</a:t>
             </a:r>
-            <a:endParaRPr lang="en-US" sz="980" dirty="0"/>
-          </a:p>
-          <a:p>
-            <a:pPr marL="0" indent="0">
-              <a:buNone/>
-            </a:pPr>
-            <a:r>
-              <a:rPr lang="en-US" sz="980" dirty="0">
+            <a:endParaRPr lang="en-US" sz="800" dirty="0"/>
+          </a:p>
+          <a:p>
+            <a:pPr marL="0" indent="0">
+              <a:buNone/>
+            </a:pPr>
+            <a:r>
+              <a:rPr lang="en-US" sz="800" dirty="0">
                 <a:solidFill>
                   <a:srgbClr val="7DD3FC"/>
                 </a:solidFill>
@@ -6574,14 +6438,14 @@
               </a:rPr>
               <a:t>else:</a:t>
             </a:r>
-            <a:endParaRPr lang="en-US" sz="980" dirty="0"/>
-          </a:p>
-          <a:p>
-            <a:pPr marL="0" indent="0">
-              <a:buNone/>
-            </a:pPr>
-            <a:r>
-              <a:rPr lang="en-US" sz="980" dirty="0">
+            <a:endParaRPr lang="en-US" sz="800" dirty="0"/>
+          </a:p>
+          <a:p>
+            <a:pPr marL="0" indent="0">
+              <a:buNone/>
+            </a:pPr>
+            <a:r>
+              <a:rPr lang="en-US" sz="800" dirty="0">
                 <a:solidFill>
                   <a:srgbClr val="7DD3FC"/>
                 </a:solidFill>
@@ -6591,7 +6455,7 @@
               </a:rPr>
               <a:t>    print("Failed after", max_attempts, "attempts")</a:t>
             </a:r>
-            <a:endParaRPr lang="en-US" sz="980" dirty="0"/>
+            <a:endParaRPr lang="en-US" sz="800" dirty="0"/>
           </a:p>
         </p:txBody>
       </p:sp>
@@ -6603,8 +6467,8 @@
         </p:nvSpPr>
         <p:spPr>
           <a:xfrm>
-            <a:off x="4663440" y="2468880"/>
-            <a:ext cx="3474720" cy="246888"/>
+            <a:off x="4572000" y="2151431"/>
+            <a:ext cx="3196509" cy="186100"/>
           </a:xfrm>
           <a:prstGeom prst="rect">
             <a:avLst/>
@@ -6628,8 +6492,8 @@
         </p:nvSpPr>
         <p:spPr>
           <a:xfrm>
-            <a:off x="4663440" y="2468880"/>
-            <a:ext cx="3474720" cy="246888"/>
+            <a:off x="4572000" y="2151431"/>
+            <a:ext cx="3196509" cy="186100"/>
           </a:xfrm>
           <a:prstGeom prst="rect">
             <a:avLst/>
@@ -6667,8 +6531,8 @@
         </p:nvSpPr>
         <p:spPr>
           <a:xfrm>
-            <a:off x="4663440" y="2743200"/>
-            <a:ext cx="4224528" cy="950976"/>
+            <a:off x="4570552" y="2351460"/>
+            <a:ext cx="4330385" cy="1263905"/>
           </a:xfrm>
           <a:prstGeom prst="rect">
             <a:avLst/>
@@ -6692,7 +6556,7 @@
         </p:nvSpPr>
         <p:spPr>
           <a:xfrm>
-            <a:off x="4791456" y="2834640"/>
+            <a:off x="4673562" y="2358824"/>
             <a:ext cx="3968496" cy="768096"/>
           </a:xfrm>
           <a:prstGeom prst="rect">
@@ -6709,7 +6573,7 @@
               <a:buNone/>
             </a:pPr>
             <a:r>
-              <a:rPr lang="en-US" sz="980" dirty="0">
+              <a:rPr lang="en-US" sz="800" dirty="0">
                 <a:solidFill>
                   <a:srgbClr val="7DD3FC"/>
                 </a:solidFill>
@@ -6719,14 +6583,14 @@
               </a:rPr>
               <a:t># Sum numbers — stop when 0 is entered</a:t>
             </a:r>
-            <a:endParaRPr lang="en-US" sz="980" dirty="0"/>
-          </a:p>
-          <a:p>
-            <a:pPr marL="0" indent="0">
-              <a:buNone/>
-            </a:pPr>
-            <a:r>
-              <a:rPr lang="en-US" sz="980" dirty="0">
+            <a:endParaRPr lang="en-US" sz="800" dirty="0"/>
+          </a:p>
+          <a:p>
+            <a:pPr marL="0" indent="0">
+              <a:buNone/>
+            </a:pPr>
+            <a:r>
+              <a:rPr lang="en-US" sz="800" dirty="0">
                 <a:solidFill>
                   <a:srgbClr val="7DD3FC"/>
                 </a:solidFill>
@@ -6736,14 +6600,14 @@
               </a:rPr>
               <a:t>total = 0</a:t>
             </a:r>
-            <a:endParaRPr lang="en-US" sz="980" dirty="0"/>
-          </a:p>
-          <a:p>
-            <a:pPr marL="0" indent="0">
-              <a:buNone/>
-            </a:pPr>
-            <a:r>
-              <a:rPr lang="en-US" sz="980" dirty="0">
+            <a:endParaRPr lang="en-US" sz="800" dirty="0"/>
+          </a:p>
+          <a:p>
+            <a:pPr marL="0" indent="0">
+              <a:buNone/>
+            </a:pPr>
+            <a:r>
+              <a:rPr lang="en-US" sz="800" dirty="0">
                 <a:solidFill>
                   <a:srgbClr val="7DD3FC"/>
                 </a:solidFill>
@@ -6753,20 +6617,20 @@
               </a:rPr>
               <a:t>print("Enter numbers (0 to finish):")</a:t>
             </a:r>
-            <a:endParaRPr lang="en-US" sz="980" dirty="0"/>
-          </a:p>
-          <a:p>
-            <a:pPr marL="0" indent="0">
-              <a:buNone/>
-            </a:pPr>
-            <a:endParaRPr lang="en-US" sz="980" dirty="0"/>
-          </a:p>
-          <a:p>
-            <a:pPr marL="0" indent="0">
-              <a:buNone/>
-            </a:pPr>
-            <a:r>
-              <a:rPr lang="en-US" sz="980" dirty="0">
+            <a:endParaRPr lang="en-US" sz="800" dirty="0"/>
+          </a:p>
+          <a:p>
+            <a:pPr marL="0" indent="0">
+              <a:buNone/>
+            </a:pPr>
+            <a:endParaRPr lang="en-US" sz="800" dirty="0"/>
+          </a:p>
+          <a:p>
+            <a:pPr marL="0" indent="0">
+              <a:buNone/>
+            </a:pPr>
+            <a:r>
+              <a:rPr lang="en-US" sz="800" dirty="0">
                 <a:solidFill>
                   <a:srgbClr val="7DD3FC"/>
                 </a:solidFill>
@@ -6776,14 +6640,14 @@
               </a:rPr>
               <a:t>num = int(input("&gt; "))</a:t>
             </a:r>
-            <a:endParaRPr lang="en-US" sz="980" dirty="0"/>
-          </a:p>
-          <a:p>
-            <a:pPr marL="0" indent="0">
-              <a:buNone/>
-            </a:pPr>
-            <a:r>
-              <a:rPr lang="en-US" sz="980" dirty="0">
+            <a:endParaRPr lang="en-US" sz="800" dirty="0"/>
+          </a:p>
+          <a:p>
+            <a:pPr marL="0" indent="0">
+              <a:buNone/>
+            </a:pPr>
+            <a:r>
+              <a:rPr lang="en-US" sz="800" dirty="0">
                 <a:solidFill>
                   <a:srgbClr val="7DD3FC"/>
                 </a:solidFill>
@@ -6793,14 +6657,14 @@
               </a:rPr>
               <a:t>while num != 0:</a:t>
             </a:r>
-            <a:endParaRPr lang="en-US" sz="980" dirty="0"/>
-          </a:p>
-          <a:p>
-            <a:pPr marL="0" indent="0">
-              <a:buNone/>
-            </a:pPr>
-            <a:r>
-              <a:rPr lang="en-US" sz="980" dirty="0">
+            <a:endParaRPr lang="en-US" sz="800" dirty="0"/>
+          </a:p>
+          <a:p>
+            <a:pPr marL="0" indent="0">
+              <a:buNone/>
+            </a:pPr>
+            <a:r>
+              <a:rPr lang="en-US" sz="800" dirty="0">
                 <a:solidFill>
                   <a:srgbClr val="7DD3FC"/>
                 </a:solidFill>
@@ -6810,14 +6674,14 @@
               </a:rPr>
               <a:t>    total += num</a:t>
             </a:r>
-            <a:endParaRPr lang="en-US" sz="980" dirty="0"/>
-          </a:p>
-          <a:p>
-            <a:pPr marL="0" indent="0">
-              <a:buNone/>
-            </a:pPr>
-            <a:r>
-              <a:rPr lang="en-US" sz="980" dirty="0">
+            <a:endParaRPr lang="en-US" sz="800" dirty="0"/>
+          </a:p>
+          <a:p>
+            <a:pPr marL="0" indent="0">
+              <a:buNone/>
+            </a:pPr>
+            <a:r>
+              <a:rPr lang="en-US" sz="800" dirty="0">
                 <a:solidFill>
                   <a:srgbClr val="7DD3FC"/>
                 </a:solidFill>
@@ -6827,20 +6691,20 @@
               </a:rPr>
               <a:t>    num = int(input("&gt; "))</a:t>
             </a:r>
-            <a:endParaRPr lang="en-US" sz="980" dirty="0"/>
-          </a:p>
-          <a:p>
-            <a:pPr marL="0" indent="0">
-              <a:buNone/>
-            </a:pPr>
-            <a:endParaRPr lang="en-US" sz="980" dirty="0"/>
-          </a:p>
-          <a:p>
-            <a:pPr marL="0" indent="0">
-              <a:buNone/>
-            </a:pPr>
-            <a:r>
-              <a:rPr lang="en-US" sz="980" dirty="0">
+            <a:endParaRPr lang="en-US" sz="800" dirty="0"/>
+          </a:p>
+          <a:p>
+            <a:pPr marL="0" indent="0">
+              <a:buNone/>
+            </a:pPr>
+            <a:endParaRPr lang="en-US" sz="800" dirty="0"/>
+          </a:p>
+          <a:p>
+            <a:pPr marL="0" indent="0">
+              <a:buNone/>
+            </a:pPr>
+            <a:r>
+              <a:rPr lang="en-US" sz="800" dirty="0">
                 <a:solidFill>
                   <a:srgbClr val="7DD3FC"/>
                 </a:solidFill>
@@ -6850,7 +6714,7 @@
               </a:rPr>
               <a:t>print("Total:", total)</a:t>
             </a:r>
-            <a:endParaRPr lang="en-US" sz="980" dirty="0"/>
+            <a:endParaRPr lang="en-US" sz="800" dirty="0"/>
           </a:p>
         </p:txBody>
       </p:sp>
@@ -6862,8 +6726,8 @@
         </p:nvSpPr>
         <p:spPr>
           <a:xfrm>
-            <a:off x="4663440" y="3749040"/>
-            <a:ext cx="3474720" cy="246888"/>
+            <a:off x="4572650" y="3644792"/>
+            <a:ext cx="3417002" cy="159986"/>
           </a:xfrm>
           <a:prstGeom prst="rect">
             <a:avLst/>
@@ -6887,8 +6751,8 @@
         </p:nvSpPr>
         <p:spPr>
           <a:xfrm>
-            <a:off x="4663440" y="3749040"/>
-            <a:ext cx="3474720" cy="246888"/>
+            <a:off x="4572650" y="3644792"/>
+            <a:ext cx="3417002" cy="159986"/>
           </a:xfrm>
           <a:prstGeom prst="rect">
             <a:avLst/>
@@ -6926,8 +6790,8 @@
         </p:nvSpPr>
         <p:spPr>
           <a:xfrm>
-            <a:off x="4663440" y="4023360"/>
-            <a:ext cx="4224528" cy="658368"/>
+            <a:off x="4579135" y="3823812"/>
+            <a:ext cx="4224528" cy="998205"/>
           </a:xfrm>
           <a:prstGeom prst="rect">
             <a:avLst/>
@@ -6951,8 +6815,8 @@
         </p:nvSpPr>
         <p:spPr>
           <a:xfrm>
-            <a:off x="4791456" y="4114800"/>
-            <a:ext cx="3968496" cy="475488"/>
+            <a:off x="4616361" y="3848910"/>
+            <a:ext cx="3968496" cy="893840"/>
           </a:xfrm>
           <a:prstGeom prst="rect">
             <a:avLst/>
@@ -6968,7 +6832,7 @@
               <a:buNone/>
             </a:pPr>
             <a:r>
-              <a:rPr lang="en-US" sz="980" dirty="0">
+              <a:rPr lang="en-US" sz="800" dirty="0">
                 <a:solidFill>
                   <a:srgbClr val="7DD3FC"/>
                 </a:solidFill>
@@ -6978,14 +6842,14 @@
               </a:rPr>
               <a:t># Server-style event loop</a:t>
             </a:r>
-            <a:endParaRPr lang="en-US" sz="980" dirty="0"/>
-          </a:p>
-          <a:p>
-            <a:pPr marL="0" indent="0">
-              <a:buNone/>
-            </a:pPr>
-            <a:r>
-              <a:rPr lang="en-US" sz="980" dirty="0">
+            <a:endParaRPr lang="en-US" sz="800" dirty="0"/>
+          </a:p>
+          <a:p>
+            <a:pPr marL="0" indent="0">
+              <a:buNone/>
+            </a:pPr>
+            <a:r>
+              <a:rPr lang="en-US" sz="800" dirty="0">
                 <a:solidFill>
                   <a:srgbClr val="7DD3FC"/>
                 </a:solidFill>
@@ -6995,14 +6859,14 @@
               </a:rPr>
               <a:t>while True:</a:t>
             </a:r>
-            <a:endParaRPr lang="en-US" sz="980" dirty="0"/>
-          </a:p>
-          <a:p>
-            <a:pPr marL="0" indent="0">
-              <a:buNone/>
-            </a:pPr>
-            <a:r>
-              <a:rPr lang="en-US" sz="980" dirty="0">
+            <a:endParaRPr lang="en-US" sz="800" dirty="0"/>
+          </a:p>
+          <a:p>
+            <a:pPr marL="0" indent="0">
+              <a:buNone/>
+            </a:pPr>
+            <a:r>
+              <a:rPr lang="en-US" sz="800" dirty="0">
                 <a:solidFill>
                   <a:srgbClr val="7DD3FC"/>
                 </a:solidFill>
@@ -7012,14 +6876,14 @@
               </a:rPr>
               <a:t>    command = input("Command: ")</a:t>
             </a:r>
-            <a:endParaRPr lang="en-US" sz="980" dirty="0"/>
-          </a:p>
-          <a:p>
-            <a:pPr marL="0" indent="0">
-              <a:buNone/>
-            </a:pPr>
-            <a:r>
-              <a:rPr lang="en-US" sz="980" dirty="0">
+            <a:endParaRPr lang="en-US" sz="800" dirty="0"/>
+          </a:p>
+          <a:p>
+            <a:pPr marL="0" indent="0">
+              <a:buNone/>
+            </a:pPr>
+            <a:r>
+              <a:rPr lang="en-US" sz="800" dirty="0">
                 <a:solidFill>
                   <a:srgbClr val="7DD3FC"/>
                 </a:solidFill>
@@ -7029,14 +6893,14 @@
               </a:rPr>
               <a:t>    if command == "quit":</a:t>
             </a:r>
-            <a:endParaRPr lang="en-US" sz="980" dirty="0"/>
-          </a:p>
-          <a:p>
-            <a:pPr marL="0" indent="0">
-              <a:buNone/>
-            </a:pPr>
-            <a:r>
-              <a:rPr lang="en-US" sz="980" dirty="0">
+            <a:endParaRPr lang="en-US" sz="800" dirty="0"/>
+          </a:p>
+          <a:p>
+            <a:pPr marL="0" indent="0">
+              <a:buNone/>
+            </a:pPr>
+            <a:r>
+              <a:rPr lang="en-US" sz="800" dirty="0">
                 <a:solidFill>
                   <a:srgbClr val="7DD3FC"/>
                 </a:solidFill>
@@ -7046,14 +6910,14 @@
               </a:rPr>
               <a:t>        print("Shutting down...")</a:t>
             </a:r>
-            <a:endParaRPr lang="en-US" sz="980" dirty="0"/>
-          </a:p>
-          <a:p>
-            <a:pPr marL="0" indent="0">
-              <a:buNone/>
-            </a:pPr>
-            <a:r>
-              <a:rPr lang="en-US" sz="980" dirty="0">
+            <a:endParaRPr lang="en-US" sz="800" dirty="0"/>
+          </a:p>
+          <a:p>
+            <a:pPr marL="0" indent="0">
+              <a:buNone/>
+            </a:pPr>
+            <a:r>
+              <a:rPr lang="en-US" sz="800" dirty="0">
                 <a:solidFill>
                   <a:srgbClr val="7DD3FC"/>
                 </a:solidFill>
@@ -7063,14 +6927,14 @@
               </a:rPr>
               <a:t>        break</a:t>
             </a:r>
-            <a:endParaRPr lang="en-US" sz="980" dirty="0"/>
-          </a:p>
-          <a:p>
-            <a:pPr marL="0" indent="0">
-              <a:buNone/>
-            </a:pPr>
-            <a:r>
-              <a:rPr lang="en-US" sz="980" dirty="0">
+            <a:endParaRPr lang="en-US" sz="800" dirty="0"/>
+          </a:p>
+          <a:p>
+            <a:pPr marL="0" indent="0">
+              <a:buNone/>
+            </a:pPr>
+            <a:r>
+              <a:rPr lang="en-US" sz="800" dirty="0">
                 <a:solidFill>
                   <a:srgbClr val="7DD3FC"/>
                 </a:solidFill>
@@ -7080,96 +6944,7 @@
               </a:rPr>
               <a:t>    print("Executing:", command)</a:t>
             </a:r>
-            <a:endParaRPr lang="en-US" sz="980" dirty="0"/>
-          </a:p>
-        </p:txBody>
-      </p:sp>
-      <p:sp>
-        <p:nvSpPr>
-          <p:cNvPr id="44" name="Shape 42"/>
-          <p:cNvSpPr/>
-          <p:nvPr/>
-        </p:nvSpPr>
-        <p:spPr>
-          <a:xfrm>
-            <a:off x="4663440" y="4727448"/>
-            <a:ext cx="4224528" cy="475488"/>
-          </a:xfrm>
-          <a:prstGeom prst="rect">
-            <a:avLst/>
-          </a:prstGeom>
-          <a:solidFill>
-            <a:srgbClr val="0D1B2A"/>
-          </a:solidFill>
-          <a:ln w="12700">
-            <a:solidFill>
-              <a:srgbClr val="A78BFA"/>
-            </a:solidFill>
-            <a:prstDash val="solid"/>
-          </a:ln>
-        </p:spPr>
-      </p:sp>
-      <p:sp>
-        <p:nvSpPr>
-          <p:cNvPr id="45" name="Shape 43"/>
-          <p:cNvSpPr/>
-          <p:nvPr/>
-        </p:nvSpPr>
-        <p:spPr>
-          <a:xfrm>
-            <a:off x="4663440" y="4727448"/>
-            <a:ext cx="64008" cy="475488"/>
-          </a:xfrm>
-          <a:prstGeom prst="rect">
-            <a:avLst/>
-          </a:prstGeom>
-          <a:solidFill>
-            <a:srgbClr val="A78BFA"/>
-          </a:solidFill>
-          <a:ln w="12700">
-            <a:solidFill>
-              <a:srgbClr val="A78BFA"/>
-            </a:solidFill>
-            <a:prstDash val="solid"/>
-          </a:ln>
-        </p:spPr>
-      </p:sp>
-      <p:sp>
-        <p:nvSpPr>
-          <p:cNvPr id="46" name="Text 44"/>
-          <p:cNvSpPr/>
-          <p:nvPr/>
-        </p:nvSpPr>
-        <p:spPr>
-          <a:xfrm>
-            <a:off x="4809744" y="4764024"/>
-            <a:ext cx="4041648" cy="219456"/>
-          </a:xfrm>
-          <a:prstGeom prst="rect">
-            <a:avLst/>
-          </a:prstGeom>
-          <a:noFill/>
-          <a:ln/>
-        </p:spPr>
-        <p:txBody>
-          <a:bodyPr wrap="square" lIns="0" tIns="0" rIns="0" bIns="0" rtlCol="0" anchor="ctr"/>
-          <a:lstStyle/>
-          <a:p>
-            <a:pPr marL="0" indent="0">
-              <a:buNone/>
-            </a:pPr>
-            <a:r>
-              <a:rPr lang="en-US" sz="1100" b="1" dirty="0">
-                <a:solidFill>
-                  <a:srgbClr val="A78BFA"/>
-                </a:solidFill>
-                <a:latin typeface="Calibri" pitchFamily="34" charset="0"/>
-                <a:ea typeface="Calibri" pitchFamily="34" charset="-122"/>
-                <a:cs typeface="Calibri" pitchFamily="34" charset="-120"/>
-              </a:rPr>
-              <a:t>🔗  ControlFlowExamples.md</a:t>
-            </a:r>
-            <a:endParaRPr lang="en-US" sz="1100" dirty="0"/>
+            <a:endParaRPr lang="en-US" sz="800" dirty="0"/>
           </a:p>
         </p:txBody>
       </p:sp>
@@ -7183,7 +6958,7 @@
         </p:nvSpPr>
         <p:spPr>
           <a:xfrm>
-            <a:off x="4809744" y="4983480"/>
+            <a:off x="4757864" y="4925113"/>
             <a:ext cx="4041648" cy="182880"/>
           </a:xfrm>
           <a:prstGeom prst="rect">
@@ -7262,8 +7037,8 @@
         </p:nvSpPr>
         <p:spPr>
           <a:xfrm>
-            <a:off x="0" y="0"/>
-            <a:ext cx="9144000" cy="658368"/>
+            <a:off x="-1" y="12970"/>
+            <a:ext cx="9066179" cy="361188"/>
           </a:xfrm>
           <a:prstGeom prst="rect">
             <a:avLst/>
@@ -7287,8 +7062,8 @@
         </p:nvSpPr>
         <p:spPr>
           <a:xfrm>
-            <a:off x="0" y="0"/>
-            <a:ext cx="164592" cy="658368"/>
+            <a:off x="-1" y="0"/>
+            <a:ext cx="177943" cy="330740"/>
           </a:xfrm>
           <a:prstGeom prst="rect">
             <a:avLst/>
@@ -7312,8 +7087,8 @@
         </p:nvSpPr>
         <p:spPr>
           <a:xfrm>
-            <a:off x="292608" y="0"/>
-            <a:ext cx="8046720" cy="658368"/>
+            <a:off x="273152" y="32425"/>
+            <a:ext cx="8699449" cy="330740"/>
           </a:xfrm>
           <a:prstGeom prst="rect">
             <a:avLst/>
@@ -7351,8 +7126,8 @@
         </p:nvSpPr>
         <p:spPr>
           <a:xfrm>
-            <a:off x="8275320" y="0"/>
-            <a:ext cx="731520" cy="658368"/>
+            <a:off x="8255864" y="0"/>
+            <a:ext cx="790859" cy="330740"/>
           </a:xfrm>
           <a:prstGeom prst="rect">
             <a:avLst/>
@@ -7384,31 +7159,6 @@
       </p:sp>
       <p:sp>
         <p:nvSpPr>
-          <p:cNvPr id="6" name="Shape 4"/>
-          <p:cNvSpPr/>
-          <p:nvPr/>
-        </p:nvSpPr>
-        <p:spPr>
-          <a:xfrm>
-            <a:off x="0" y="4992624"/>
-            <a:ext cx="9144000" cy="27432"/>
-          </a:xfrm>
-          <a:prstGeom prst="rect">
-            <a:avLst/>
-          </a:prstGeom>
-          <a:solidFill>
-            <a:srgbClr val="334155"/>
-          </a:solidFill>
-          <a:ln w="12700">
-            <a:solidFill>
-              <a:srgbClr val="334155"/>
-            </a:solidFill>
-            <a:prstDash val="solid"/>
-          </a:ln>
-        </p:spPr>
-      </p:sp>
-      <p:sp>
-        <p:nvSpPr>
           <p:cNvPr id="7" name="Text 5"/>
           <p:cNvSpPr/>
           <p:nvPr/>
@@ -7454,8 +7204,8 @@
         </p:nvSpPr>
         <p:spPr>
           <a:xfrm>
-            <a:off x="256032" y="804672"/>
-            <a:ext cx="1828800" cy="246888"/>
+            <a:off x="191182" y="428538"/>
+            <a:ext cx="1449550" cy="164592"/>
           </a:xfrm>
           <a:prstGeom prst="rect">
             <a:avLst/>
@@ -7479,8 +7229,8 @@
         </p:nvSpPr>
         <p:spPr>
           <a:xfrm>
-            <a:off x="256032" y="804672"/>
-            <a:ext cx="1828800" cy="246888"/>
+            <a:off x="191182" y="428538"/>
+            <a:ext cx="1449550" cy="164592"/>
           </a:xfrm>
           <a:prstGeom prst="rect">
             <a:avLst/>
@@ -7518,7 +7268,7 @@
         </p:nvSpPr>
         <p:spPr>
           <a:xfrm>
-            <a:off x="256032" y="1097280"/>
+            <a:off x="191182" y="611418"/>
             <a:ext cx="4078224" cy="676656"/>
           </a:xfrm>
           <a:prstGeom prst="rect">
@@ -7539,7 +7289,7 @@
               <a:buChar char="•"/>
             </a:pPr>
             <a:r>
-              <a:rPr lang="en-US" sz="1100" dirty="0">
+              <a:rPr lang="en-US" sz="800" dirty="0">
                 <a:solidFill>
                   <a:srgbClr val="CBD5E1"/>
                 </a:solidFill>
@@ -7549,7 +7299,7 @@
               </a:rPr>
               <a:t>Iterate over every item in a collection</a:t>
             </a:r>
-            <a:endParaRPr lang="en-US" sz="1100" dirty="0"/>
+            <a:endParaRPr lang="en-US" sz="800" dirty="0"/>
           </a:p>
           <a:p>
             <a:pPr marL="342900" indent="-342900">
@@ -7560,7 +7310,7 @@
               <a:buChar char="•"/>
             </a:pPr>
             <a:r>
-              <a:rPr lang="en-US" sz="1100" dirty="0">
+              <a:rPr lang="en-US" sz="800" dirty="0">
                 <a:solidFill>
                   <a:srgbClr val="CBD5E1"/>
                 </a:solidFill>
@@ -7570,7 +7320,7 @@
               </a:rPr>
               <a:t>When you KNOW how many iterations in advance</a:t>
             </a:r>
-            <a:endParaRPr lang="en-US" sz="1100" dirty="0"/>
+            <a:endParaRPr lang="en-US" sz="800" dirty="0"/>
           </a:p>
           <a:p>
             <a:pPr marL="342900" indent="-342900">
@@ -7581,7 +7331,7 @@
               <a:buChar char="•"/>
             </a:pPr>
             <a:r>
-              <a:rPr lang="en-US" sz="1100" dirty="0">
+              <a:rPr lang="en-US" sz="800" dirty="0">
                 <a:solidFill>
                   <a:srgbClr val="CBD5E1"/>
                 </a:solidFill>
@@ -7591,7 +7341,7 @@
               </a:rPr>
               <a:t>Process lists, dicts, strings, ranges, files</a:t>
             </a:r>
-            <a:endParaRPr lang="en-US" sz="1100" dirty="0"/>
+            <a:endParaRPr lang="en-US" sz="800" dirty="0"/>
           </a:p>
           <a:p>
             <a:pPr marL="342900" indent="-342900">
@@ -7599,7 +7349,7 @@
               <a:buChar char="•"/>
             </a:pPr>
             <a:r>
-              <a:rPr lang="en-US" sz="1100" dirty="0">
+              <a:rPr lang="en-US" sz="800" dirty="0">
                 <a:solidFill>
                   <a:srgbClr val="CBD5E1"/>
                 </a:solidFill>
@@ -7609,7 +7359,7 @@
               </a:rPr>
               <a:t>More readable than while when iterating sequences</a:t>
             </a:r>
-            <a:endParaRPr lang="en-US" sz="1100" dirty="0"/>
+            <a:endParaRPr lang="en-US" sz="800" dirty="0"/>
           </a:p>
         </p:txBody>
       </p:sp>
@@ -7621,8 +7371,8 @@
         </p:nvSpPr>
         <p:spPr>
           <a:xfrm>
-            <a:off x="256032" y="1837944"/>
-            <a:ext cx="1371600" cy="246888"/>
+            <a:off x="191182" y="1312655"/>
+            <a:ext cx="1216086" cy="179538"/>
           </a:xfrm>
           <a:prstGeom prst="rect">
             <a:avLst/>
@@ -7646,8 +7396,8 @@
         </p:nvSpPr>
         <p:spPr>
           <a:xfrm>
-            <a:off x="256032" y="1837944"/>
-            <a:ext cx="1371600" cy="246888"/>
+            <a:off x="191182" y="1312655"/>
+            <a:ext cx="1216086" cy="179538"/>
           </a:xfrm>
           <a:prstGeom prst="rect">
             <a:avLst/>
@@ -7685,8 +7435,8 @@
         </p:nvSpPr>
         <p:spPr>
           <a:xfrm>
-            <a:off x="256032" y="2121408"/>
-            <a:ext cx="4078224" cy="1188720"/>
+            <a:off x="184696" y="1544238"/>
+            <a:ext cx="4143073" cy="1705969"/>
           </a:xfrm>
           <a:prstGeom prst="rect">
             <a:avLst/>
@@ -7710,7 +7460,7 @@
         </p:nvSpPr>
         <p:spPr>
           <a:xfrm>
-            <a:off x="384048" y="2212848"/>
+            <a:off x="243062" y="1524784"/>
             <a:ext cx="3822192" cy="1005840"/>
           </a:xfrm>
           <a:prstGeom prst="rect">
@@ -7727,7 +7477,7 @@
               <a:buNone/>
             </a:pPr>
             <a:r>
-              <a:rPr lang="en-US" sz="980" dirty="0">
+              <a:rPr lang="en-US" sz="800" dirty="0">
                 <a:solidFill>
                   <a:srgbClr val="7DD3FC"/>
                 </a:solidFill>
@@ -7737,14 +7487,14 @@
               </a:rPr>
               <a:t>for item in iterable:</a:t>
             </a:r>
-            <a:endParaRPr lang="en-US" sz="980" dirty="0"/>
-          </a:p>
-          <a:p>
-            <a:pPr marL="0" indent="0">
-              <a:buNone/>
-            </a:pPr>
-            <a:r>
-              <a:rPr lang="en-US" sz="980" dirty="0">
+            <a:endParaRPr lang="en-US" sz="800" dirty="0"/>
+          </a:p>
+          <a:p>
+            <a:pPr marL="0" indent="0">
+              <a:buNone/>
+            </a:pPr>
+            <a:r>
+              <a:rPr lang="en-US" sz="800" dirty="0">
                 <a:solidFill>
                   <a:srgbClr val="7DD3FC"/>
                 </a:solidFill>
@@ -7754,20 +7504,20 @@
               </a:rPr>
               <a:t>    # body — runs once per item</a:t>
             </a:r>
-            <a:endParaRPr lang="en-US" sz="980" dirty="0"/>
-          </a:p>
-          <a:p>
-            <a:pPr marL="0" indent="0">
-              <a:buNone/>
-            </a:pPr>
-            <a:endParaRPr lang="en-US" sz="980" dirty="0"/>
-          </a:p>
-          <a:p>
-            <a:pPr marL="0" indent="0">
-              <a:buNone/>
-            </a:pPr>
-            <a:r>
-              <a:rPr lang="en-US" sz="980" dirty="0">
+            <a:endParaRPr lang="en-US" sz="800" dirty="0"/>
+          </a:p>
+          <a:p>
+            <a:pPr marL="0" indent="0">
+              <a:buNone/>
+            </a:pPr>
+            <a:endParaRPr lang="en-US" sz="800" dirty="0"/>
+          </a:p>
+          <a:p>
+            <a:pPr marL="0" indent="0">
+              <a:buNone/>
+            </a:pPr>
+            <a:r>
+              <a:rPr lang="en-US" sz="800" dirty="0">
                 <a:solidFill>
                   <a:srgbClr val="7DD3FC"/>
                 </a:solidFill>
@@ -7777,14 +7527,14 @@
               </a:rPr>
               <a:t># With range</a:t>
             </a:r>
-            <a:endParaRPr lang="en-US" sz="980" dirty="0"/>
-          </a:p>
-          <a:p>
-            <a:pPr marL="0" indent="0">
-              <a:buNone/>
-            </a:pPr>
-            <a:r>
-              <a:rPr lang="en-US" sz="980" dirty="0">
+            <a:endParaRPr lang="en-US" sz="800" dirty="0"/>
+          </a:p>
+          <a:p>
+            <a:pPr marL="0" indent="0">
+              <a:buNone/>
+            </a:pPr>
+            <a:r>
+              <a:rPr lang="en-US" sz="800" dirty="0">
                 <a:solidFill>
                   <a:srgbClr val="7DD3FC"/>
                 </a:solidFill>
@@ -7794,14 +7544,14 @@
               </a:rPr>
               <a:t>for i in range(start, stop, step):</a:t>
             </a:r>
-            <a:endParaRPr lang="en-US" sz="980" dirty="0"/>
-          </a:p>
-          <a:p>
-            <a:pPr marL="0" indent="0">
-              <a:buNone/>
-            </a:pPr>
-            <a:r>
-              <a:rPr lang="en-US" sz="980" dirty="0">
+            <a:endParaRPr lang="en-US" sz="800" dirty="0"/>
+          </a:p>
+          <a:p>
+            <a:pPr marL="0" indent="0">
+              <a:buNone/>
+            </a:pPr>
+            <a:r>
+              <a:rPr lang="en-US" sz="800" dirty="0">
                 <a:solidFill>
                   <a:srgbClr val="7DD3FC"/>
                 </a:solidFill>
@@ -7811,20 +7561,20 @@
               </a:rPr>
               <a:t>    ...</a:t>
             </a:r>
-            <a:endParaRPr lang="en-US" sz="980" dirty="0"/>
-          </a:p>
-          <a:p>
-            <a:pPr marL="0" indent="0">
-              <a:buNone/>
-            </a:pPr>
-            <a:endParaRPr lang="en-US" sz="980" dirty="0"/>
-          </a:p>
-          <a:p>
-            <a:pPr marL="0" indent="0">
-              <a:buNone/>
-            </a:pPr>
-            <a:r>
-              <a:rPr lang="en-US" sz="980" dirty="0">
+            <a:endParaRPr lang="en-US" sz="800" dirty="0"/>
+          </a:p>
+          <a:p>
+            <a:pPr marL="0" indent="0">
+              <a:buNone/>
+            </a:pPr>
+            <a:endParaRPr lang="en-US" sz="800" dirty="0"/>
+          </a:p>
+          <a:p>
+            <a:pPr marL="0" indent="0">
+              <a:buNone/>
+            </a:pPr>
+            <a:r>
+              <a:rPr lang="en-US" sz="800" dirty="0">
                 <a:solidFill>
                   <a:srgbClr val="7DD3FC"/>
                 </a:solidFill>
@@ -7834,14 +7584,14 @@
               </a:rPr>
               <a:t># With enumerate (index + value)</a:t>
             </a:r>
-            <a:endParaRPr lang="en-US" sz="980" dirty="0"/>
-          </a:p>
-          <a:p>
-            <a:pPr marL="0" indent="0">
-              <a:buNone/>
-            </a:pPr>
-            <a:r>
-              <a:rPr lang="en-US" sz="980" dirty="0">
+            <a:endParaRPr lang="en-US" sz="800" dirty="0"/>
+          </a:p>
+          <a:p>
+            <a:pPr marL="0" indent="0">
+              <a:buNone/>
+            </a:pPr>
+            <a:r>
+              <a:rPr lang="en-US" sz="800" dirty="0">
                 <a:solidFill>
                   <a:srgbClr val="7DD3FC"/>
                 </a:solidFill>
@@ -7851,14 +7601,14 @@
               </a:rPr>
               <a:t>for i, val in enumerate(lst):</a:t>
             </a:r>
-            <a:endParaRPr lang="en-US" sz="980" dirty="0"/>
-          </a:p>
-          <a:p>
-            <a:pPr marL="0" indent="0">
-              <a:buNone/>
-            </a:pPr>
-            <a:r>
-              <a:rPr lang="en-US" sz="980" dirty="0">
+            <a:endParaRPr lang="en-US" sz="800" dirty="0"/>
+          </a:p>
+          <a:p>
+            <a:pPr marL="0" indent="0">
+              <a:buNone/>
+            </a:pPr>
+            <a:r>
+              <a:rPr lang="en-US" sz="800" dirty="0">
                 <a:solidFill>
                   <a:srgbClr val="7DD3FC"/>
                 </a:solidFill>
@@ -7868,20 +7618,20 @@
               </a:rPr>
               <a:t>    print(i, val)</a:t>
             </a:r>
-            <a:endParaRPr lang="en-US" sz="980" dirty="0"/>
-          </a:p>
-          <a:p>
-            <a:pPr marL="0" indent="0">
-              <a:buNone/>
-            </a:pPr>
-            <a:endParaRPr lang="en-US" sz="980" dirty="0"/>
-          </a:p>
-          <a:p>
-            <a:pPr marL="0" indent="0">
-              <a:buNone/>
-            </a:pPr>
-            <a:r>
-              <a:rPr lang="en-US" sz="980" dirty="0">
+            <a:endParaRPr lang="en-US" sz="800" dirty="0"/>
+          </a:p>
+          <a:p>
+            <a:pPr marL="0" indent="0">
+              <a:buNone/>
+            </a:pPr>
+            <a:endParaRPr lang="en-US" sz="800" dirty="0"/>
+          </a:p>
+          <a:p>
+            <a:pPr marL="0" indent="0">
+              <a:buNone/>
+            </a:pPr>
+            <a:r>
+              <a:rPr lang="en-US" sz="800" dirty="0">
                 <a:solidFill>
                   <a:srgbClr val="7DD3FC"/>
                 </a:solidFill>
@@ -7891,14 +7641,14 @@
               </a:rPr>
               <a:t># With dict</a:t>
             </a:r>
-            <a:endParaRPr lang="en-US" sz="980" dirty="0"/>
-          </a:p>
-          <a:p>
-            <a:pPr marL="0" indent="0">
-              <a:buNone/>
-            </a:pPr>
-            <a:r>
-              <a:rPr lang="en-US" sz="980" dirty="0">
+            <a:endParaRPr lang="en-US" sz="800" dirty="0"/>
+          </a:p>
+          <a:p>
+            <a:pPr marL="0" indent="0">
+              <a:buNone/>
+            </a:pPr>
+            <a:r>
+              <a:rPr lang="en-US" sz="800" dirty="0">
                 <a:solidFill>
                   <a:srgbClr val="7DD3FC"/>
                 </a:solidFill>
@@ -7908,14 +7658,14 @@
               </a:rPr>
               <a:t>for key, value in d.items():</a:t>
             </a:r>
-            <a:endParaRPr lang="en-US" sz="980" dirty="0"/>
-          </a:p>
-          <a:p>
-            <a:pPr marL="0" indent="0">
-              <a:buNone/>
-            </a:pPr>
-            <a:r>
-              <a:rPr lang="en-US" sz="980" dirty="0">
+            <a:endParaRPr lang="en-US" sz="800" dirty="0"/>
+          </a:p>
+          <a:p>
+            <a:pPr marL="0" indent="0">
+              <a:buNone/>
+            </a:pPr>
+            <a:r>
+              <a:rPr lang="en-US" sz="800" dirty="0">
                 <a:solidFill>
                   <a:srgbClr val="7DD3FC"/>
                 </a:solidFill>
@@ -7925,71 +7675,7 @@
               </a:rPr>
               <a:t>    print(key, "-&gt;", value)</a:t>
             </a:r>
-            <a:endParaRPr lang="en-US" sz="980" dirty="0"/>
-          </a:p>
-        </p:txBody>
-      </p:sp>
-      <p:sp>
-        <p:nvSpPr>
-          <p:cNvPr id="15" name="Shape 13"/>
-          <p:cNvSpPr/>
-          <p:nvPr/>
-        </p:nvSpPr>
-        <p:spPr>
-          <a:xfrm>
-            <a:off x="256032" y="3364992"/>
-            <a:ext cx="2011680" cy="246888"/>
-          </a:xfrm>
-          <a:prstGeom prst="rect">
-            <a:avLst/>
-          </a:prstGeom>
-          <a:solidFill>
-            <a:srgbClr val="34D399"/>
-          </a:solidFill>
-          <a:ln w="12700">
-            <a:solidFill>
-              <a:srgbClr val="34D399"/>
-            </a:solidFill>
-            <a:prstDash val="solid"/>
-          </a:ln>
-        </p:spPr>
-      </p:sp>
-      <p:sp>
-        <p:nvSpPr>
-          <p:cNvPr id="16" name="Text 14"/>
-          <p:cNvSpPr/>
-          <p:nvPr/>
-        </p:nvSpPr>
-        <p:spPr>
-          <a:xfrm>
-            <a:off x="256032" y="3364992"/>
-            <a:ext cx="2011680" cy="246888"/>
-          </a:xfrm>
-          <a:prstGeom prst="rect">
-            <a:avLst/>
-          </a:prstGeom>
-          <a:noFill/>
-          <a:ln/>
-        </p:spPr>
-        <p:txBody>
-          <a:bodyPr wrap="square" lIns="0" tIns="0" rIns="0" bIns="0" rtlCol="0" anchor="ctr"/>
-          <a:lstStyle/>
-          <a:p>
-            <a:pPr marL="0" indent="0" algn="ctr">
-              <a:buNone/>
-            </a:pPr>
-            <a:r>
-              <a:rPr lang="en-US" sz="850" b="1" dirty="0">
-                <a:solidFill>
-                  <a:srgbClr val="0F172A"/>
-                </a:solidFill>
-                <a:latin typeface="Calibri" pitchFamily="34" charset="0"/>
-                <a:ea typeface="Calibri" pitchFamily="34" charset="-122"/>
-                <a:cs typeface="Calibri" pitchFamily="34" charset="-120"/>
-              </a:rPr>
-              <a:t>JUMP STATEMENTS</a:t>
-            </a:r>
-            <a:endParaRPr lang="en-US" sz="850" dirty="0"/>
+            <a:endParaRPr lang="en-US" sz="800" dirty="0"/>
           </a:p>
         </p:txBody>
       </p:sp>
@@ -8002,28 +7688,28 @@
           <p:nvPr>
             <p:extLst>
               <p:ext uri="{D42A27DB-BD31-4B8C-83A1-F6EECF244321}">
-                <p14:modId xmlns:p14="http://schemas.microsoft.com/office/powerpoint/2010/main" val="1579011935"/>
+                <p14:modId xmlns:p14="http://schemas.microsoft.com/office/powerpoint/2010/main" val="2141908572"/>
               </p:ext>
             </p:extLst>
           </p:nvPr>
         </p:nvGraphicFramePr>
         <p:xfrm>
-          <a:off x="256032" y="3639312"/>
-          <a:ext cx="4078224" cy="1170432"/>
+          <a:off x="178212" y="3308573"/>
+          <a:ext cx="4143074" cy="869912"/>
         </p:xfrm>
         <a:graphic>
           <a:graphicData uri="http://schemas.openxmlformats.org/drawingml/2006/table">
             <a:tbl>
               <a:tblPr/>
               <a:tblGrid>
-                <a:gridCol w="1042416">
+                <a:gridCol w="1058992">
                   <a:extLst>
                     <a:ext uri="{9D8B030D-6E8A-4147-A177-3AD203B41FA5}">
                       <a16:colId xmlns:a16="http://schemas.microsoft.com/office/drawing/2014/main" val="20000"/>
                     </a:ext>
                   </a:extLst>
                 </a:gridCol>
-                <a:gridCol w="3035808">
+                <a:gridCol w="3084082">
                   <a:extLst>
                     <a:ext uri="{9D8B030D-6E8A-4147-A177-3AD203B41FA5}">
                       <a16:colId xmlns:a16="http://schemas.microsoft.com/office/drawing/2014/main" val="20001"/>
@@ -8031,7 +7717,7 @@
                   </a:extLst>
                 </a:gridCol>
               </a:tblGrid>
-              <a:tr h="292608">
+              <a:tr h="217478">
                 <a:tc>
                   <a:txBody>
                     <a:bodyPr/>
@@ -8041,14 +7727,14 @@
                         <a:buNone/>
                       </a:pPr>
                       <a:r>
-                        <a:rPr lang="en-US" sz="950" b="1" dirty="0">
+                        <a:rPr lang="en-US" sz="800" b="1" dirty="0">
                           <a:solidFill>
                             <a:srgbClr val="F1F5F9"/>
                           </a:solidFill>
                         </a:rPr>
                         <a:t>Statement</a:t>
                       </a:r>
-                      <a:endParaRPr lang="en-US" sz="950" dirty="0"/>
+                      <a:endParaRPr lang="en-US" sz="800" dirty="0"/>
                     </a:p>
                   </a:txBody>
                   <a:tcPr>
@@ -8102,14 +7788,14 @@
                         <a:buNone/>
                       </a:pPr>
                       <a:r>
-                        <a:rPr lang="en-US" sz="950" b="1" dirty="0">
+                        <a:rPr lang="en-US" sz="800" b="1" dirty="0">
                           <a:solidFill>
                             <a:srgbClr val="F1F5F9"/>
                           </a:solidFill>
                         </a:rPr>
                         <a:t>Effect</a:t>
                       </a:r>
-                      <a:endParaRPr lang="en-US" sz="950" dirty="0"/>
+                      <a:endParaRPr lang="en-US" sz="800" dirty="0"/>
                     </a:p>
                   </a:txBody>
                   <a:tcPr>
@@ -8160,7 +7846,7 @@
                   </a:ext>
                 </a:extLst>
               </a:tr>
-              <a:tr h="292608">
+              <a:tr h="217478">
                 <a:tc>
                   <a:txBody>
                     <a:bodyPr/>
@@ -8170,7 +7856,7 @@
                         <a:buNone/>
                       </a:pPr>
                       <a:r>
-                        <a:rPr lang="en-US" sz="950" dirty="0">
+                        <a:rPr lang="en-US" sz="800" dirty="0">
                           <a:solidFill>
                             <a:srgbClr val="34D399"/>
                           </a:solidFill>
@@ -8180,7 +7866,7 @@
                         </a:rPr>
                         <a:t>break</a:t>
                       </a:r>
-                      <a:endParaRPr lang="en-US" sz="950" dirty="0">
+                      <a:endParaRPr lang="en-US" sz="800" dirty="0">
                         <a:latin typeface="Consolas" charset="0"/>
                         <a:ea typeface="Consolas" charset="0"/>
                         <a:cs typeface="Consolas" charset="0"/>
@@ -8238,14 +7924,14 @@
                         <a:buNone/>
                       </a:pPr>
                       <a:r>
-                        <a:rPr lang="en-US" sz="950" dirty="0">
+                        <a:rPr lang="en-US" sz="800" dirty="0">
                           <a:solidFill>
                             <a:srgbClr val="CBD5E1"/>
                           </a:solidFill>
                         </a:rPr>
                         <a:t>Exit the loop immediately — skip else block</a:t>
                       </a:r>
-                      <a:endParaRPr lang="en-US" sz="950" dirty="0"/>
+                      <a:endParaRPr lang="en-US" sz="800" dirty="0"/>
                     </a:p>
                   </a:txBody>
                   <a:tcPr>
@@ -8296,7 +7982,7 @@
                   </a:ext>
                 </a:extLst>
               </a:tr>
-              <a:tr h="292608">
+              <a:tr h="217478">
                 <a:tc>
                   <a:txBody>
                     <a:bodyPr/>
@@ -8306,7 +7992,7 @@
                         <a:buNone/>
                       </a:pPr>
                       <a:r>
-                        <a:rPr lang="en-US" sz="950" dirty="0">
+                        <a:rPr lang="en-US" sz="800" dirty="0">
                           <a:solidFill>
                             <a:srgbClr val="34D399"/>
                           </a:solidFill>
@@ -8316,7 +8002,7 @@
                         </a:rPr>
                         <a:t>continue</a:t>
                       </a:r>
-                      <a:endParaRPr lang="en-US" sz="950" dirty="0">
+                      <a:endParaRPr lang="en-US" sz="800" dirty="0">
                         <a:latin typeface="Consolas" charset="0"/>
                         <a:ea typeface="Consolas" charset="0"/>
                         <a:cs typeface="Consolas" charset="0"/>
@@ -8374,14 +8060,14 @@
                         <a:buNone/>
                       </a:pPr>
                       <a:r>
-                        <a:rPr lang="en-US" sz="950" dirty="0">
+                        <a:rPr lang="en-US" sz="800" dirty="0">
                           <a:solidFill>
                             <a:srgbClr val="CBD5E1"/>
                           </a:solidFill>
                         </a:rPr>
                         <a:t>Skip rest of current iteration; go to next</a:t>
                       </a:r>
-                      <a:endParaRPr lang="en-US" sz="950" dirty="0"/>
+                      <a:endParaRPr lang="en-US" sz="800" dirty="0"/>
                     </a:p>
                   </a:txBody>
                   <a:tcPr>
@@ -8432,7 +8118,7 @@
                   </a:ext>
                 </a:extLst>
               </a:tr>
-              <a:tr h="292608">
+              <a:tr h="217478">
                 <a:tc>
                   <a:txBody>
                     <a:bodyPr/>
@@ -8442,7 +8128,7 @@
                         <a:buNone/>
                       </a:pPr>
                       <a:r>
-                        <a:rPr lang="en-US" sz="950" dirty="0">
+                        <a:rPr lang="en-US" sz="800" dirty="0">
                           <a:solidFill>
                             <a:srgbClr val="34D399"/>
                           </a:solidFill>
@@ -8452,7 +8138,7 @@
                         </a:rPr>
                         <a:t>pass</a:t>
                       </a:r>
-                      <a:endParaRPr lang="en-US" sz="950" dirty="0">
+                      <a:endParaRPr lang="en-US" sz="800" dirty="0">
                         <a:latin typeface="Consolas" charset="0"/>
                         <a:ea typeface="Consolas" charset="0"/>
                         <a:cs typeface="Consolas" charset="0"/>
@@ -8510,14 +8196,14 @@
                         <a:buNone/>
                       </a:pPr>
                       <a:r>
-                        <a:rPr lang="en-US" sz="950" dirty="0">
+                        <a:rPr lang="en-US" sz="800" dirty="0">
                           <a:solidFill>
                             <a:srgbClr val="CBD5E1"/>
                           </a:solidFill>
                         </a:rPr>
                         <a:t>Do nothing — placeholder for empty blocks</a:t>
                       </a:r>
-                      <a:endParaRPr lang="en-US" sz="950" dirty="0"/>
+                      <a:endParaRPr lang="en-US" sz="800" dirty="0"/>
                     </a:p>
                   </a:txBody>
                   <a:tcPr>
@@ -8574,14 +8260,841 @@
       </p:graphicFrame>
       <p:sp>
         <p:nvSpPr>
-          <p:cNvPr id="18" name="Shape 15"/>
-          <p:cNvSpPr/>
-          <p:nvPr/>
-        </p:nvSpPr>
-        <p:spPr>
-          <a:xfrm>
-            <a:off x="256032" y="4535424"/>
-            <a:ext cx="1645920" cy="246888"/>
+          <p:cNvPr id="20" name="Shape 17"/>
+          <p:cNvSpPr/>
+          <p:nvPr/>
+        </p:nvSpPr>
+        <p:spPr>
+          <a:xfrm>
+            <a:off x="177942" y="4342102"/>
+            <a:ext cx="4156314" cy="568226"/>
+          </a:xfrm>
+          <a:prstGeom prst="rect">
+            <a:avLst/>
+          </a:prstGeom>
+          <a:solidFill>
+            <a:srgbClr val="0D1B2A"/>
+          </a:solidFill>
+          <a:ln w="12700">
+            <a:solidFill>
+              <a:srgbClr val="1E3A5F"/>
+            </a:solidFill>
+            <a:prstDash val="solid"/>
+          </a:ln>
+        </p:spPr>
+      </p:sp>
+      <p:sp>
+        <p:nvSpPr>
+          <p:cNvPr id="21" name="Text 18"/>
+          <p:cNvSpPr/>
+          <p:nvPr/>
+        </p:nvSpPr>
+        <p:spPr>
+          <a:xfrm>
+            <a:off x="260833" y="4388865"/>
+            <a:ext cx="3822192" cy="376134"/>
+          </a:xfrm>
+          <a:prstGeom prst="rect">
+            <a:avLst/>
+          </a:prstGeom>
+          <a:noFill/>
+          <a:ln/>
+        </p:spPr>
+        <p:txBody>
+          <a:bodyPr wrap="square" lIns="0" tIns="0" rIns="0" bIns="0" rtlCol="0" anchor="t"/>
+          <a:lstStyle/>
+          <a:p>
+            <a:pPr marL="0" indent="0">
+              <a:buNone/>
+            </a:pPr>
+            <a:r>
+              <a:rPr lang="en-US" sz="800" dirty="0">
+                <a:solidFill>
+                  <a:srgbClr val="7DD3FC"/>
+                </a:solidFill>
+                <a:latin typeface="Consolas" pitchFamily="34" charset="0"/>
+                <a:ea typeface="Consolas" pitchFamily="34" charset="-122"/>
+                <a:cs typeface="Consolas" pitchFamily="34" charset="-120"/>
+              </a:rPr>
+              <a:t>for n in [1,2,3,4,5]:</a:t>
+            </a:r>
+            <a:endParaRPr lang="en-US" sz="800" dirty="0"/>
+          </a:p>
+          <a:p>
+            <a:pPr marL="0" indent="0">
+              <a:buNone/>
+            </a:pPr>
+            <a:r>
+              <a:rPr lang="en-US" sz="800" dirty="0">
+                <a:solidFill>
+                  <a:srgbClr val="7DD3FC"/>
+                </a:solidFill>
+                <a:latin typeface="Consolas" pitchFamily="34" charset="0"/>
+                <a:ea typeface="Consolas" pitchFamily="34" charset="-122"/>
+                <a:cs typeface="Consolas" pitchFamily="34" charset="-120"/>
+              </a:rPr>
+              <a:t>    if n == 3: continue  # skip 3</a:t>
+            </a:r>
+            <a:endParaRPr lang="en-US" sz="800" dirty="0"/>
+          </a:p>
+          <a:p>
+            <a:pPr marL="0" indent="0">
+              <a:buNone/>
+            </a:pPr>
+            <a:r>
+              <a:rPr lang="en-US" sz="800" dirty="0">
+                <a:solidFill>
+                  <a:srgbClr val="7DD3FC"/>
+                </a:solidFill>
+                <a:latin typeface="Consolas" pitchFamily="34" charset="0"/>
+                <a:ea typeface="Consolas" pitchFamily="34" charset="-122"/>
+                <a:cs typeface="Consolas" pitchFamily="34" charset="-120"/>
+              </a:rPr>
+              <a:t>    if n == 5: break     # stop at 5</a:t>
+            </a:r>
+            <a:endParaRPr lang="en-US" sz="800" dirty="0"/>
+          </a:p>
+          <a:p>
+            <a:pPr marL="0" indent="0">
+              <a:buNone/>
+            </a:pPr>
+            <a:r>
+              <a:rPr lang="en-US" sz="800" dirty="0">
+                <a:solidFill>
+                  <a:srgbClr val="7DD3FC"/>
+                </a:solidFill>
+                <a:latin typeface="Consolas" pitchFamily="34" charset="0"/>
+                <a:ea typeface="Consolas" pitchFamily="34" charset="-122"/>
+                <a:cs typeface="Consolas" pitchFamily="34" charset="-120"/>
+              </a:rPr>
+              <a:t>    print(n)             # prints 1, 2, 4</a:t>
+            </a:r>
+            <a:endParaRPr lang="en-US" sz="800" dirty="0"/>
+          </a:p>
+        </p:txBody>
+      </p:sp>
+      <p:sp>
+        <p:nvSpPr>
+          <p:cNvPr id="22" name="Shape 19"/>
+          <p:cNvSpPr/>
+          <p:nvPr/>
+        </p:nvSpPr>
+        <p:spPr>
+          <a:xfrm>
+            <a:off x="4462272" y="804672"/>
+            <a:ext cx="27432" cy="4133088"/>
+          </a:xfrm>
+          <a:prstGeom prst="rect">
+            <a:avLst/>
+          </a:prstGeom>
+          <a:solidFill>
+            <a:srgbClr val="334155"/>
+          </a:solidFill>
+          <a:ln w="12700">
+            <a:solidFill>
+              <a:srgbClr val="334155"/>
+            </a:solidFill>
+            <a:prstDash val="solid"/>
+          </a:ln>
+        </p:spPr>
+      </p:sp>
+      <p:sp>
+        <p:nvSpPr>
+          <p:cNvPr id="25" name="Shape 22"/>
+          <p:cNvSpPr/>
+          <p:nvPr/>
+        </p:nvSpPr>
+        <p:spPr>
+          <a:xfrm>
+            <a:off x="4650470" y="401590"/>
+            <a:ext cx="4237498" cy="1333596"/>
+          </a:xfrm>
+          <a:prstGeom prst="rect">
+            <a:avLst/>
+          </a:prstGeom>
+          <a:solidFill>
+            <a:srgbClr val="0D1B2A"/>
+          </a:solidFill>
+          <a:ln w="12700">
+            <a:solidFill>
+              <a:srgbClr val="1E3A5F"/>
+            </a:solidFill>
+            <a:prstDash val="solid"/>
+          </a:ln>
+        </p:spPr>
+      </p:sp>
+      <p:sp>
+        <p:nvSpPr>
+          <p:cNvPr id="26" name="Text 23"/>
+          <p:cNvSpPr/>
+          <p:nvPr/>
+        </p:nvSpPr>
+        <p:spPr>
+          <a:xfrm>
+            <a:off x="4695736" y="425567"/>
+            <a:ext cx="4038149" cy="1298625"/>
+          </a:xfrm>
+          <a:prstGeom prst="rect">
+            <a:avLst/>
+          </a:prstGeom>
+          <a:noFill/>
+          <a:ln/>
+        </p:spPr>
+        <p:txBody>
+          <a:bodyPr wrap="square" lIns="0" tIns="0" rIns="0" bIns="0" rtlCol="0" anchor="t"/>
+          <a:lstStyle/>
+          <a:p>
+            <a:pPr marL="0" indent="0">
+              <a:buNone/>
+            </a:pPr>
+            <a:r>
+              <a:rPr lang="en-US" sz="800" dirty="0">
+                <a:solidFill>
+                  <a:srgbClr val="7DD3FC"/>
+                </a:solidFill>
+                <a:latin typeface="Consolas" pitchFamily="34" charset="0"/>
+                <a:ea typeface="Consolas" pitchFamily="34" charset="-122"/>
+                <a:cs typeface="Consolas" pitchFamily="34" charset="-120"/>
+              </a:rPr>
+              <a:t># Loop over a list</a:t>
+            </a:r>
+            <a:endParaRPr lang="en-US" sz="800" dirty="0"/>
+          </a:p>
+          <a:p>
+            <a:pPr marL="0" indent="0">
+              <a:buNone/>
+            </a:pPr>
+            <a:r>
+              <a:rPr lang="en-US" sz="800" dirty="0">
+                <a:solidFill>
+                  <a:srgbClr val="7DD3FC"/>
+                </a:solidFill>
+                <a:latin typeface="Consolas" pitchFamily="34" charset="0"/>
+                <a:ea typeface="Consolas" pitchFamily="34" charset="-122"/>
+                <a:cs typeface="Consolas" pitchFamily="34" charset="-120"/>
+              </a:rPr>
+              <a:t>fruits = ['apple', 'mango', 'kiwi']</a:t>
+            </a:r>
+            <a:endParaRPr lang="en-US" sz="800" dirty="0"/>
+          </a:p>
+          <a:p>
+            <a:pPr marL="0" indent="0">
+              <a:buNone/>
+            </a:pPr>
+            <a:r>
+              <a:rPr lang="en-US" sz="800" dirty="0">
+                <a:solidFill>
+                  <a:srgbClr val="7DD3FC"/>
+                </a:solidFill>
+                <a:latin typeface="Consolas" pitchFamily="34" charset="0"/>
+                <a:ea typeface="Consolas" pitchFamily="34" charset="-122"/>
+                <a:cs typeface="Consolas" pitchFamily="34" charset="-120"/>
+              </a:rPr>
+              <a:t>for fruit in fruits:</a:t>
+            </a:r>
+            <a:endParaRPr lang="en-US" sz="800" dirty="0"/>
+          </a:p>
+          <a:p>
+            <a:pPr marL="0" indent="0">
+              <a:buNone/>
+            </a:pPr>
+            <a:r>
+              <a:rPr lang="en-US" sz="800" dirty="0">
+                <a:solidFill>
+                  <a:srgbClr val="7DD3FC"/>
+                </a:solidFill>
+                <a:latin typeface="Consolas" pitchFamily="34" charset="0"/>
+                <a:ea typeface="Consolas" pitchFamily="34" charset="-122"/>
+                <a:cs typeface="Consolas" pitchFamily="34" charset="-120"/>
+              </a:rPr>
+              <a:t>    print(fruit.upper())</a:t>
+            </a:r>
+            <a:endParaRPr lang="en-US" sz="800" dirty="0"/>
+          </a:p>
+          <a:p>
+            <a:pPr marL="0" indent="0">
+              <a:buNone/>
+            </a:pPr>
+            <a:endParaRPr lang="en-US" sz="800" dirty="0"/>
+          </a:p>
+          <a:p>
+            <a:pPr marL="0" indent="0">
+              <a:buNone/>
+            </a:pPr>
+            <a:r>
+              <a:rPr lang="en-US" sz="800" dirty="0">
+                <a:solidFill>
+                  <a:srgbClr val="7DD3FC"/>
+                </a:solidFill>
+                <a:latin typeface="Consolas" pitchFamily="34" charset="0"/>
+                <a:ea typeface="Consolas" pitchFamily="34" charset="-122"/>
+                <a:cs typeface="Consolas" pitchFamily="34" charset="-120"/>
+              </a:rPr>
+              <a:t># Loop over dict key-value pairs</a:t>
+            </a:r>
+            <a:endParaRPr lang="en-US" sz="800" dirty="0"/>
+          </a:p>
+          <a:p>
+            <a:pPr marL="0" indent="0">
+              <a:buNone/>
+            </a:pPr>
+            <a:r>
+              <a:rPr lang="en-US" sz="800" dirty="0">
+                <a:solidFill>
+                  <a:srgbClr val="7DD3FC"/>
+                </a:solidFill>
+                <a:latin typeface="Consolas" pitchFamily="34" charset="0"/>
+                <a:ea typeface="Consolas" pitchFamily="34" charset="-122"/>
+                <a:cs typeface="Consolas" pitchFamily="34" charset="-120"/>
+              </a:rPr>
+              <a:t>scores = {'Alice': 92, 'Bob': 78, 'Carol': 88}</a:t>
+            </a:r>
+            <a:endParaRPr lang="en-US" sz="800" dirty="0"/>
+          </a:p>
+          <a:p>
+            <a:pPr marL="0" indent="0">
+              <a:buNone/>
+            </a:pPr>
+            <a:r>
+              <a:rPr lang="en-US" sz="800" dirty="0">
+                <a:solidFill>
+                  <a:srgbClr val="7DD3FC"/>
+                </a:solidFill>
+                <a:latin typeface="Consolas" pitchFamily="34" charset="0"/>
+                <a:ea typeface="Consolas" pitchFamily="34" charset="-122"/>
+                <a:cs typeface="Consolas" pitchFamily="34" charset="-120"/>
+              </a:rPr>
+              <a:t>for name, score in scores.items():</a:t>
+            </a:r>
+            <a:endParaRPr lang="en-US" sz="800" dirty="0"/>
+          </a:p>
+          <a:p>
+            <a:pPr marL="0" indent="0">
+              <a:buNone/>
+            </a:pPr>
+            <a:r>
+              <a:rPr lang="en-US" sz="800" dirty="0">
+                <a:solidFill>
+                  <a:srgbClr val="7DD3FC"/>
+                </a:solidFill>
+                <a:latin typeface="Consolas" pitchFamily="34" charset="0"/>
+                <a:ea typeface="Consolas" pitchFamily="34" charset="-122"/>
+                <a:cs typeface="Consolas" pitchFamily="34" charset="-120"/>
+              </a:rPr>
+              <a:t>    grade = "Pass" if score &gt;= 80 else "Fail"</a:t>
+            </a:r>
+            <a:endParaRPr lang="en-US" sz="800" dirty="0"/>
+          </a:p>
+          <a:p>
+            <a:pPr marL="0" indent="0">
+              <a:buNone/>
+            </a:pPr>
+            <a:r>
+              <a:rPr lang="en-US" sz="800" dirty="0">
+                <a:solidFill>
+                  <a:srgbClr val="7DD3FC"/>
+                </a:solidFill>
+                <a:latin typeface="Consolas" pitchFamily="34" charset="0"/>
+                <a:ea typeface="Consolas" pitchFamily="34" charset="-122"/>
+                <a:cs typeface="Consolas" pitchFamily="34" charset="-120"/>
+              </a:rPr>
+              <a:t>    print(f"{name}: {score} → {grade}")</a:t>
+            </a:r>
+            <a:endParaRPr lang="en-US" sz="800" dirty="0"/>
+          </a:p>
+        </p:txBody>
+      </p:sp>
+      <p:sp>
+        <p:nvSpPr>
+          <p:cNvPr id="29" name="Shape 26"/>
+          <p:cNvSpPr/>
+          <p:nvPr/>
+        </p:nvSpPr>
+        <p:spPr>
+          <a:xfrm>
+            <a:off x="4635466" y="1805140"/>
+            <a:ext cx="4265472" cy="1542991"/>
+          </a:xfrm>
+          <a:prstGeom prst="rect">
+            <a:avLst/>
+          </a:prstGeom>
+          <a:solidFill>
+            <a:srgbClr val="0D1B2A"/>
+          </a:solidFill>
+          <a:ln w="12700">
+            <a:solidFill>
+              <a:srgbClr val="1E3A5F"/>
+            </a:solidFill>
+            <a:prstDash val="solid"/>
+          </a:ln>
+        </p:spPr>
+      </p:sp>
+      <p:sp>
+        <p:nvSpPr>
+          <p:cNvPr id="30" name="Text 27"/>
+          <p:cNvSpPr/>
+          <p:nvPr/>
+        </p:nvSpPr>
+        <p:spPr>
+          <a:xfrm>
+            <a:off x="4682797" y="1834370"/>
+            <a:ext cx="3968496" cy="932688"/>
+          </a:xfrm>
+          <a:prstGeom prst="rect">
+            <a:avLst/>
+          </a:prstGeom>
+          <a:noFill/>
+          <a:ln/>
+        </p:spPr>
+        <p:txBody>
+          <a:bodyPr wrap="square" lIns="0" tIns="0" rIns="0" bIns="0" rtlCol="0" anchor="t"/>
+          <a:lstStyle/>
+          <a:p>
+            <a:pPr marL="0" indent="0">
+              <a:buNone/>
+            </a:pPr>
+            <a:r>
+              <a:rPr lang="en-US" sz="800" dirty="0">
+                <a:solidFill>
+                  <a:srgbClr val="7DD3FC"/>
+                </a:solidFill>
+                <a:latin typeface="Consolas" pitchFamily="34" charset="0"/>
+                <a:ea typeface="Consolas" pitchFamily="34" charset="-122"/>
+                <a:cs typeface="Consolas" pitchFamily="34" charset="-120"/>
+              </a:rPr>
+              <a:t># range: count 0 to 4</a:t>
+            </a:r>
+            <a:endParaRPr lang="en-US" sz="800" dirty="0"/>
+          </a:p>
+          <a:p>
+            <a:pPr marL="0" indent="0">
+              <a:buNone/>
+            </a:pPr>
+            <a:r>
+              <a:rPr lang="en-US" sz="800" dirty="0">
+                <a:solidFill>
+                  <a:srgbClr val="7DD3FC"/>
+                </a:solidFill>
+                <a:latin typeface="Consolas" pitchFamily="34" charset="0"/>
+                <a:ea typeface="Consolas" pitchFamily="34" charset="-122"/>
+                <a:cs typeface="Consolas" pitchFamily="34" charset="-120"/>
+              </a:rPr>
+              <a:t>for i in range(5):</a:t>
+            </a:r>
+            <a:endParaRPr lang="en-US" sz="800" dirty="0"/>
+          </a:p>
+          <a:p>
+            <a:pPr marL="0" indent="0">
+              <a:buNone/>
+            </a:pPr>
+            <a:r>
+              <a:rPr lang="en-US" sz="800" dirty="0">
+                <a:solidFill>
+                  <a:srgbClr val="7DD3FC"/>
+                </a:solidFill>
+                <a:latin typeface="Consolas" pitchFamily="34" charset="0"/>
+                <a:ea typeface="Consolas" pitchFamily="34" charset="-122"/>
+                <a:cs typeface="Consolas" pitchFamily="34" charset="-120"/>
+              </a:rPr>
+              <a:t>    print(i, end=" ")   # 0 1 2 3 4</a:t>
+            </a:r>
+            <a:endParaRPr lang="en-US" sz="800" dirty="0"/>
+          </a:p>
+          <a:p>
+            <a:pPr marL="0" indent="0">
+              <a:buNone/>
+            </a:pPr>
+            <a:endParaRPr lang="en-US" sz="800" dirty="0"/>
+          </a:p>
+          <a:p>
+            <a:pPr marL="0" indent="0">
+              <a:buNone/>
+            </a:pPr>
+            <a:r>
+              <a:rPr lang="en-US" sz="800" dirty="0">
+                <a:solidFill>
+                  <a:srgbClr val="7DD3FC"/>
+                </a:solidFill>
+                <a:latin typeface="Consolas" pitchFamily="34" charset="0"/>
+                <a:ea typeface="Consolas" pitchFamily="34" charset="-122"/>
+                <a:cs typeface="Consolas" pitchFamily="34" charset="-120"/>
+              </a:rPr>
+              <a:t># range with step</a:t>
+            </a:r>
+            <a:endParaRPr lang="en-US" sz="800" dirty="0"/>
+          </a:p>
+          <a:p>
+            <a:pPr marL="0" indent="0">
+              <a:buNone/>
+            </a:pPr>
+            <a:r>
+              <a:rPr lang="en-US" sz="800" dirty="0">
+                <a:solidFill>
+                  <a:srgbClr val="7DD3FC"/>
+                </a:solidFill>
+                <a:latin typeface="Consolas" pitchFamily="34" charset="0"/>
+                <a:ea typeface="Consolas" pitchFamily="34" charset="-122"/>
+                <a:cs typeface="Consolas" pitchFamily="34" charset="-120"/>
+              </a:rPr>
+              <a:t>for i in range(0, 20, 5):</a:t>
+            </a:r>
+            <a:endParaRPr lang="en-US" sz="800" dirty="0"/>
+          </a:p>
+          <a:p>
+            <a:pPr marL="0" indent="0">
+              <a:buNone/>
+            </a:pPr>
+            <a:r>
+              <a:rPr lang="en-US" sz="800" dirty="0">
+                <a:solidFill>
+                  <a:srgbClr val="7DD3FC"/>
+                </a:solidFill>
+                <a:latin typeface="Consolas" pitchFamily="34" charset="0"/>
+                <a:ea typeface="Consolas" pitchFamily="34" charset="-122"/>
+                <a:cs typeface="Consolas" pitchFamily="34" charset="-120"/>
+              </a:rPr>
+              <a:t>    print(i, end=" ")   # 0 5 10 15</a:t>
+            </a:r>
+            <a:endParaRPr lang="en-US" sz="800" dirty="0"/>
+          </a:p>
+          <a:p>
+            <a:pPr marL="0" indent="0">
+              <a:buNone/>
+            </a:pPr>
+            <a:endParaRPr lang="en-US" sz="800" dirty="0"/>
+          </a:p>
+          <a:p>
+            <a:pPr marL="0" indent="0">
+              <a:buNone/>
+            </a:pPr>
+            <a:r>
+              <a:rPr lang="en-US" sz="800" dirty="0">
+                <a:solidFill>
+                  <a:srgbClr val="7DD3FC"/>
+                </a:solidFill>
+                <a:latin typeface="Consolas" pitchFamily="34" charset="0"/>
+                <a:ea typeface="Consolas" pitchFamily="34" charset="-122"/>
+                <a:cs typeface="Consolas" pitchFamily="34" charset="-120"/>
+              </a:rPr>
+              <a:t># enumerate: get index + value</a:t>
+            </a:r>
+            <a:endParaRPr lang="en-US" sz="800" dirty="0"/>
+          </a:p>
+          <a:p>
+            <a:pPr marL="0" indent="0">
+              <a:buNone/>
+            </a:pPr>
+            <a:r>
+              <a:rPr lang="en-US" sz="800" dirty="0">
+                <a:solidFill>
+                  <a:srgbClr val="7DD3FC"/>
+                </a:solidFill>
+                <a:latin typeface="Consolas" pitchFamily="34" charset="0"/>
+                <a:ea typeface="Consolas" pitchFamily="34" charset="-122"/>
+                <a:cs typeface="Consolas" pitchFamily="34" charset="-120"/>
+              </a:rPr>
+              <a:t>tasks = ['deploy', 'test', 'monitor']</a:t>
+            </a:r>
+            <a:endParaRPr lang="en-US" sz="800" dirty="0"/>
+          </a:p>
+          <a:p>
+            <a:pPr marL="0" indent="0">
+              <a:buNone/>
+            </a:pPr>
+            <a:r>
+              <a:rPr lang="en-US" sz="800" dirty="0">
+                <a:solidFill>
+                  <a:srgbClr val="7DD3FC"/>
+                </a:solidFill>
+                <a:latin typeface="Consolas" pitchFamily="34" charset="0"/>
+                <a:ea typeface="Consolas" pitchFamily="34" charset="-122"/>
+                <a:cs typeface="Consolas" pitchFamily="34" charset="-120"/>
+              </a:rPr>
+              <a:t>for idx, task in enumerate(tasks, start=1):</a:t>
+            </a:r>
+            <a:endParaRPr lang="en-US" sz="800" dirty="0"/>
+          </a:p>
+          <a:p>
+            <a:pPr marL="0" indent="0">
+              <a:buNone/>
+            </a:pPr>
+            <a:r>
+              <a:rPr lang="en-US" sz="800" dirty="0">
+                <a:solidFill>
+                  <a:srgbClr val="7DD3FC"/>
+                </a:solidFill>
+                <a:latin typeface="Consolas" pitchFamily="34" charset="0"/>
+                <a:ea typeface="Consolas" pitchFamily="34" charset="-122"/>
+                <a:cs typeface="Consolas" pitchFamily="34" charset="-120"/>
+              </a:rPr>
+              <a:t>    print(f"Step {idx}: {task}")</a:t>
+            </a:r>
+            <a:endParaRPr lang="en-US" sz="800" dirty="0"/>
+          </a:p>
+        </p:txBody>
+      </p:sp>
+      <p:sp>
+        <p:nvSpPr>
+          <p:cNvPr id="33" name="Shape 30"/>
+          <p:cNvSpPr/>
+          <p:nvPr/>
+        </p:nvSpPr>
+        <p:spPr>
+          <a:xfrm>
+            <a:off x="4630690" y="3407987"/>
+            <a:ext cx="4265472" cy="1610219"/>
+          </a:xfrm>
+          <a:prstGeom prst="rect">
+            <a:avLst/>
+          </a:prstGeom>
+          <a:solidFill>
+            <a:srgbClr val="0D1B2A"/>
+          </a:solidFill>
+          <a:ln w="12700">
+            <a:solidFill>
+              <a:srgbClr val="1E3A5F"/>
+            </a:solidFill>
+            <a:prstDash val="solid"/>
+          </a:ln>
+        </p:spPr>
+      </p:sp>
+      <p:sp>
+        <p:nvSpPr>
+          <p:cNvPr id="34" name="Text 31"/>
+          <p:cNvSpPr/>
+          <p:nvPr/>
+        </p:nvSpPr>
+        <p:spPr>
+          <a:xfrm>
+            <a:off x="4672427" y="3414073"/>
+            <a:ext cx="3968496" cy="731520"/>
+          </a:xfrm>
+          <a:prstGeom prst="rect">
+            <a:avLst/>
+          </a:prstGeom>
+          <a:noFill/>
+          <a:ln/>
+        </p:spPr>
+        <p:txBody>
+          <a:bodyPr wrap="square" lIns="0" tIns="0" rIns="0" bIns="0" rtlCol="0" anchor="t"/>
+          <a:lstStyle/>
+          <a:p>
+            <a:pPr marL="0" indent="0">
+              <a:buNone/>
+            </a:pPr>
+            <a:r>
+              <a:rPr lang="en-US" sz="800" dirty="0">
+                <a:solidFill>
+                  <a:srgbClr val="7DD3FC"/>
+                </a:solidFill>
+                <a:latin typeface="Consolas" pitchFamily="34" charset="0"/>
+                <a:ea typeface="Consolas" pitchFamily="34" charset="-122"/>
+                <a:cs typeface="Consolas" pitchFamily="34" charset="-120"/>
+              </a:rPr>
+              <a:t>services = ['db','cache','api','queue','ui']</a:t>
+            </a:r>
+            <a:endParaRPr lang="en-US" sz="800" dirty="0"/>
+          </a:p>
+          <a:p>
+            <a:pPr marL="0" indent="0">
+              <a:buNone/>
+            </a:pPr>
+            <a:endParaRPr lang="en-US" sz="800" dirty="0"/>
+          </a:p>
+          <a:p>
+            <a:pPr marL="0" indent="0">
+              <a:buNone/>
+            </a:pPr>
+            <a:r>
+              <a:rPr lang="en-US" sz="800" dirty="0">
+                <a:solidFill>
+                  <a:srgbClr val="7DD3FC"/>
+                </a:solidFill>
+                <a:latin typeface="Consolas" pitchFamily="34" charset="0"/>
+                <a:ea typeface="Consolas" pitchFamily="34" charset="-122"/>
+                <a:cs typeface="Consolas" pitchFamily="34" charset="-120"/>
+              </a:rPr>
+              <a:t># Find the first failing service</a:t>
+            </a:r>
+            <a:endParaRPr lang="en-US" sz="800" dirty="0"/>
+          </a:p>
+          <a:p>
+            <a:pPr marL="0" indent="0">
+              <a:buNone/>
+            </a:pPr>
+            <a:r>
+              <a:rPr lang="en-US" sz="800" dirty="0">
+                <a:solidFill>
+                  <a:srgbClr val="7DD3FC"/>
+                </a:solidFill>
+                <a:latin typeface="Consolas" pitchFamily="34" charset="0"/>
+                <a:ea typeface="Consolas" pitchFamily="34" charset="-122"/>
+                <a:cs typeface="Consolas" pitchFamily="34" charset="-120"/>
+              </a:rPr>
+              <a:t>for svc in services:</a:t>
+            </a:r>
+            <a:endParaRPr lang="en-US" sz="800" dirty="0"/>
+          </a:p>
+          <a:p>
+            <a:pPr marL="0" indent="0">
+              <a:buNone/>
+            </a:pPr>
+            <a:r>
+              <a:rPr lang="en-US" sz="800" dirty="0">
+                <a:solidFill>
+                  <a:srgbClr val="7DD3FC"/>
+                </a:solidFill>
+                <a:latin typeface="Consolas" pitchFamily="34" charset="0"/>
+                <a:ea typeface="Consolas" pitchFamily="34" charset="-122"/>
+                <a:cs typeface="Consolas" pitchFamily="34" charset="-120"/>
+              </a:rPr>
+              <a:t>    if svc == 'api':</a:t>
+            </a:r>
+            <a:endParaRPr lang="en-US" sz="800" dirty="0"/>
+          </a:p>
+          <a:p>
+            <a:pPr marL="0" indent="0">
+              <a:buNone/>
+            </a:pPr>
+            <a:r>
+              <a:rPr lang="en-US" sz="800" dirty="0">
+                <a:solidFill>
+                  <a:srgbClr val="7DD3FC"/>
+                </a:solidFill>
+                <a:latin typeface="Consolas" pitchFamily="34" charset="0"/>
+                <a:ea typeface="Consolas" pitchFamily="34" charset="-122"/>
+                <a:cs typeface="Consolas" pitchFamily="34" charset="-120"/>
+              </a:rPr>
+              <a:t>        print(f"FAILED: {svc} — stopping check")</a:t>
+            </a:r>
+            <a:endParaRPr lang="en-US" sz="800" dirty="0"/>
+          </a:p>
+          <a:p>
+            <a:pPr marL="0" indent="0">
+              <a:buNone/>
+            </a:pPr>
+            <a:r>
+              <a:rPr lang="en-US" sz="800" dirty="0">
+                <a:solidFill>
+                  <a:srgbClr val="7DD3FC"/>
+                </a:solidFill>
+                <a:latin typeface="Consolas" pitchFamily="34" charset="0"/>
+                <a:ea typeface="Consolas" pitchFamily="34" charset="-122"/>
+                <a:cs typeface="Consolas" pitchFamily="34" charset="-120"/>
+              </a:rPr>
+              <a:t>        break</a:t>
+            </a:r>
+            <a:endParaRPr lang="en-US" sz="800" dirty="0"/>
+          </a:p>
+          <a:p>
+            <a:pPr marL="0" indent="0">
+              <a:buNone/>
+            </a:pPr>
+            <a:r>
+              <a:rPr lang="en-US" sz="800" dirty="0">
+                <a:solidFill>
+                  <a:srgbClr val="7DD3FC"/>
+                </a:solidFill>
+                <a:latin typeface="Consolas" pitchFamily="34" charset="0"/>
+                <a:ea typeface="Consolas" pitchFamily="34" charset="-122"/>
+                <a:cs typeface="Consolas" pitchFamily="34" charset="-120"/>
+              </a:rPr>
+              <a:t>    print(f"OK: {svc}")</a:t>
+            </a:r>
+            <a:endParaRPr lang="en-US" sz="800" dirty="0"/>
+          </a:p>
+          <a:p>
+            <a:pPr marL="0" indent="0">
+              <a:buNone/>
+            </a:pPr>
+            <a:endParaRPr lang="en-US" sz="800" dirty="0"/>
+          </a:p>
+          <a:p>
+            <a:pPr marL="0" indent="0">
+              <a:buNone/>
+            </a:pPr>
+            <a:r>
+              <a:rPr lang="en-US" sz="800" dirty="0">
+                <a:solidFill>
+                  <a:srgbClr val="7DD3FC"/>
+                </a:solidFill>
+                <a:latin typeface="Consolas" pitchFamily="34" charset="0"/>
+                <a:ea typeface="Consolas" pitchFamily="34" charset="-122"/>
+                <a:cs typeface="Consolas" pitchFamily="34" charset="-120"/>
+              </a:rPr>
+              <a:t># Skip unknown entries</a:t>
+            </a:r>
+            <a:endParaRPr lang="en-US" sz="800" dirty="0"/>
+          </a:p>
+          <a:p>
+            <a:pPr marL="0" indent="0">
+              <a:buNone/>
+            </a:pPr>
+            <a:r>
+              <a:rPr lang="en-US" sz="800" dirty="0">
+                <a:solidFill>
+                  <a:srgbClr val="7DD3FC"/>
+                </a:solidFill>
+                <a:latin typeface="Consolas" pitchFamily="34" charset="0"/>
+                <a:ea typeface="Consolas" pitchFamily="34" charset="-122"/>
+                <a:cs typeface="Consolas" pitchFamily="34" charset="-120"/>
+              </a:rPr>
+              <a:t>for svc in services:</a:t>
+            </a:r>
+            <a:endParaRPr lang="en-US" sz="800" dirty="0"/>
+          </a:p>
+          <a:p>
+            <a:pPr marL="0" indent="0">
+              <a:buNone/>
+            </a:pPr>
+            <a:r>
+              <a:rPr lang="en-US" sz="800" dirty="0">
+                <a:solidFill>
+                  <a:srgbClr val="7DD3FC"/>
+                </a:solidFill>
+                <a:latin typeface="Consolas" pitchFamily="34" charset="0"/>
+                <a:ea typeface="Consolas" pitchFamily="34" charset="-122"/>
+                <a:cs typeface="Consolas" pitchFamily="34" charset="-120"/>
+              </a:rPr>
+              <a:t>    if svc == 'queue': continue  # skip</a:t>
+            </a:r>
+            <a:endParaRPr lang="en-US" sz="800" dirty="0"/>
+          </a:p>
+          <a:p>
+            <a:pPr marL="0" indent="0">
+              <a:buNone/>
+            </a:pPr>
+            <a:r>
+              <a:rPr lang="en-US" sz="800" dirty="0">
+                <a:solidFill>
+                  <a:srgbClr val="7DD3FC"/>
+                </a:solidFill>
+                <a:latin typeface="Consolas" pitchFamily="34" charset="0"/>
+                <a:ea typeface="Consolas" pitchFamily="34" charset="-122"/>
+                <a:cs typeface="Consolas" pitchFamily="34" charset="-120"/>
+              </a:rPr>
+              <a:t>    print("Monitoring:", svc)</a:t>
+            </a:r>
+            <a:endParaRPr lang="en-US" sz="800" dirty="0"/>
+          </a:p>
+        </p:txBody>
+      </p:sp>
+      <p:sp>
+        <p:nvSpPr>
+          <p:cNvPr id="39" name="Shape 20">
+            <a:extLst>
+              <a:ext uri="{FF2B5EF4-FFF2-40B4-BE49-F238E27FC236}">
+                <a16:creationId xmlns:a16="http://schemas.microsoft.com/office/drawing/2014/main" id="{9B2CA73D-0640-63EF-2E8C-24A3D1DAEEDA}"/>
+              </a:ext>
+            </a:extLst>
+          </p:cNvPr>
+          <p:cNvSpPr/>
+          <p:nvPr/>
+        </p:nvSpPr>
+        <p:spPr>
+          <a:xfrm>
+            <a:off x="6985817" y="448350"/>
+            <a:ext cx="1763770" cy="202842"/>
           </a:xfrm>
           <a:prstGeom prst="rect">
             <a:avLst/>
@@ -8599,14 +9112,20 @@
       </p:sp>
       <p:sp>
         <p:nvSpPr>
-          <p:cNvPr id="19" name="Text 16"/>
-          <p:cNvSpPr/>
-          <p:nvPr/>
-        </p:nvSpPr>
-        <p:spPr>
-          <a:xfrm>
-            <a:off x="256032" y="4535424"/>
-            <a:ext cx="1645920" cy="246888"/>
+          <p:cNvPr id="40" name="Text 21">
+            <a:extLst>
+              <a:ext uri="{FF2B5EF4-FFF2-40B4-BE49-F238E27FC236}">
+                <a16:creationId xmlns:a16="http://schemas.microsoft.com/office/drawing/2014/main" id="{029B2CC8-09D0-88F4-944B-CCD15448878F}"/>
+              </a:ext>
+            </a:extLst>
+          </p:cNvPr>
+          <p:cNvSpPr/>
+          <p:nvPr/>
+        </p:nvSpPr>
+        <p:spPr>
+          <a:xfrm>
+            <a:off x="6898023" y="454606"/>
+            <a:ext cx="1742900" cy="202842"/>
           </a:xfrm>
           <a:prstGeom prst="rect">
             <a:avLst/>
@@ -8630,7 +9149,7 @@
                 <a:ea typeface="Calibri" pitchFamily="34" charset="-122"/>
                 <a:cs typeface="Calibri" pitchFamily="34" charset="-120"/>
               </a:rPr>
-              <a:t>QUICK EXAMPLE</a:t>
+              <a:t>EXAMPLE 1 — Iterate list + dict</a:t>
             </a:r>
             <a:endParaRPr lang="en-US" sz="850" dirty="0"/>
           </a:p>
@@ -8638,154 +9157,20 @@
       </p:sp>
       <p:sp>
         <p:nvSpPr>
-          <p:cNvPr id="20" name="Shape 17"/>
-          <p:cNvSpPr/>
-          <p:nvPr/>
-        </p:nvSpPr>
-        <p:spPr>
-          <a:xfrm>
-            <a:off x="256032" y="4809744"/>
-            <a:ext cx="4078224" cy="128016"/>
-          </a:xfrm>
-          <a:prstGeom prst="rect">
-            <a:avLst/>
-          </a:prstGeom>
-          <a:solidFill>
-            <a:srgbClr val="0D1B2A"/>
-          </a:solidFill>
-          <a:ln w="12700">
-            <a:solidFill>
-              <a:srgbClr val="1E3A5F"/>
-            </a:solidFill>
-            <a:prstDash val="solid"/>
-          </a:ln>
-        </p:spPr>
-      </p:sp>
-      <p:sp>
-        <p:nvSpPr>
-          <p:cNvPr id="21" name="Text 18"/>
-          <p:cNvSpPr/>
-          <p:nvPr/>
-        </p:nvSpPr>
-        <p:spPr>
-          <a:xfrm>
-            <a:off x="384048" y="4901184"/>
-            <a:ext cx="3822192" cy="0"/>
-          </a:xfrm>
-          <a:prstGeom prst="rect">
-            <a:avLst/>
-          </a:prstGeom>
-          <a:noFill/>
-          <a:ln/>
-        </p:spPr>
-        <p:txBody>
-          <a:bodyPr wrap="square" lIns="0" tIns="0" rIns="0" bIns="0" rtlCol="0" anchor="t"/>
-          <a:lstStyle/>
-          <a:p>
-            <a:pPr marL="0" indent="0">
-              <a:buNone/>
-            </a:pPr>
-            <a:r>
-              <a:rPr lang="en-US" sz="980" dirty="0">
-                <a:solidFill>
-                  <a:srgbClr val="7DD3FC"/>
-                </a:solidFill>
-                <a:latin typeface="Consolas" pitchFamily="34" charset="0"/>
-                <a:ea typeface="Consolas" pitchFamily="34" charset="-122"/>
-                <a:cs typeface="Consolas" pitchFamily="34" charset="-120"/>
-              </a:rPr>
-              <a:t>for n in [1,2,3,4,5]:</a:t>
-            </a:r>
-            <a:endParaRPr lang="en-US" sz="980" dirty="0"/>
-          </a:p>
-          <a:p>
-            <a:pPr marL="0" indent="0">
-              <a:buNone/>
-            </a:pPr>
-            <a:r>
-              <a:rPr lang="en-US" sz="980" dirty="0">
-                <a:solidFill>
-                  <a:srgbClr val="7DD3FC"/>
-                </a:solidFill>
-                <a:latin typeface="Consolas" pitchFamily="34" charset="0"/>
-                <a:ea typeface="Consolas" pitchFamily="34" charset="-122"/>
-                <a:cs typeface="Consolas" pitchFamily="34" charset="-120"/>
-              </a:rPr>
-              <a:t>    if n == 3: continue  # skip 3</a:t>
-            </a:r>
-            <a:endParaRPr lang="en-US" sz="980" dirty="0"/>
-          </a:p>
-          <a:p>
-            <a:pPr marL="0" indent="0">
-              <a:buNone/>
-            </a:pPr>
-            <a:r>
-              <a:rPr lang="en-US" sz="980" dirty="0">
-                <a:solidFill>
-                  <a:srgbClr val="7DD3FC"/>
-                </a:solidFill>
-                <a:latin typeface="Consolas" pitchFamily="34" charset="0"/>
-                <a:ea typeface="Consolas" pitchFamily="34" charset="-122"/>
-                <a:cs typeface="Consolas" pitchFamily="34" charset="-120"/>
-              </a:rPr>
-              <a:t>    if n == 5: break     # stop at 5</a:t>
-            </a:r>
-            <a:endParaRPr lang="en-US" sz="980" dirty="0"/>
-          </a:p>
-          <a:p>
-            <a:pPr marL="0" indent="0">
-              <a:buNone/>
-            </a:pPr>
-            <a:r>
-              <a:rPr lang="en-US" sz="980" dirty="0">
-                <a:solidFill>
-                  <a:srgbClr val="7DD3FC"/>
-                </a:solidFill>
-                <a:latin typeface="Consolas" pitchFamily="34" charset="0"/>
-                <a:ea typeface="Consolas" pitchFamily="34" charset="-122"/>
-                <a:cs typeface="Consolas" pitchFamily="34" charset="-120"/>
-              </a:rPr>
-              <a:t>    print(n)             # prints 1, 2, 4</a:t>
-            </a:r>
-            <a:endParaRPr lang="en-US" sz="980" dirty="0"/>
-          </a:p>
-        </p:txBody>
-      </p:sp>
-      <p:sp>
-        <p:nvSpPr>
-          <p:cNvPr id="22" name="Shape 19"/>
-          <p:cNvSpPr/>
-          <p:nvPr/>
-        </p:nvSpPr>
-        <p:spPr>
-          <a:xfrm>
-            <a:off x="4462272" y="804672"/>
-            <a:ext cx="27432" cy="4133088"/>
-          </a:xfrm>
-          <a:prstGeom prst="rect">
-            <a:avLst/>
-          </a:prstGeom>
-          <a:solidFill>
-            <a:srgbClr val="334155"/>
-          </a:solidFill>
-          <a:ln w="12700">
-            <a:solidFill>
-              <a:srgbClr val="334155"/>
-            </a:solidFill>
-            <a:prstDash val="solid"/>
-          </a:ln>
-        </p:spPr>
-      </p:sp>
-      <p:sp>
-        <p:nvSpPr>
-          <p:cNvPr id="23" name="Shape 20"/>
-          <p:cNvSpPr/>
-          <p:nvPr/>
-        </p:nvSpPr>
-        <p:spPr>
-          <a:xfrm>
-            <a:off x="4663440" y="804672"/>
-            <a:ext cx="2926080" cy="246888"/>
+          <p:cNvPr id="41" name="Shape 24">
+            <a:extLst>
+              <a:ext uri="{FF2B5EF4-FFF2-40B4-BE49-F238E27FC236}">
+                <a16:creationId xmlns:a16="http://schemas.microsoft.com/office/drawing/2014/main" id="{C383C007-1A4B-DF66-93D0-EF2F9431CA0C}"/>
+              </a:ext>
+            </a:extLst>
+          </p:cNvPr>
+          <p:cNvSpPr/>
+          <p:nvPr/>
+        </p:nvSpPr>
+        <p:spPr>
+          <a:xfrm>
+            <a:off x="7015636" y="1840800"/>
+            <a:ext cx="1733951" cy="182880"/>
           </a:xfrm>
           <a:prstGeom prst="rect">
             <a:avLst/>
@@ -8803,14 +9188,20 @@
       </p:sp>
       <p:sp>
         <p:nvSpPr>
-          <p:cNvPr id="24" name="Text 21"/>
-          <p:cNvSpPr/>
-          <p:nvPr/>
-        </p:nvSpPr>
-        <p:spPr>
-          <a:xfrm>
-            <a:off x="4663440" y="804672"/>
-            <a:ext cx="2926080" cy="246888"/>
+          <p:cNvPr id="42" name="Text 25">
+            <a:extLst>
+              <a:ext uri="{FF2B5EF4-FFF2-40B4-BE49-F238E27FC236}">
+                <a16:creationId xmlns:a16="http://schemas.microsoft.com/office/drawing/2014/main" id="{6F467E2A-052D-3814-A038-F805EB7CF711}"/>
+              </a:ext>
+            </a:extLst>
+          </p:cNvPr>
+          <p:cNvSpPr/>
+          <p:nvPr/>
+        </p:nvSpPr>
+        <p:spPr>
+          <a:xfrm>
+            <a:off x="7015636" y="1840800"/>
+            <a:ext cx="1733951" cy="182880"/>
           </a:xfrm>
           <a:prstGeom prst="rect">
             <a:avLst/>
@@ -8834,7 +9225,7 @@
                 <a:ea typeface="Calibri" pitchFamily="34" charset="-122"/>
                 <a:cs typeface="Calibri" pitchFamily="34" charset="-120"/>
               </a:rPr>
-              <a:t>EXAMPLE 1 — Iterate list + dict</a:t>
+              <a:t>EXAMPLE 2 — range + enumerate</a:t>
             </a:r>
             <a:endParaRPr lang="en-US" sz="850" dirty="0"/>
           </a:p>
@@ -8842,220 +9233,20 @@
       </p:sp>
       <p:sp>
         <p:nvSpPr>
-          <p:cNvPr id="25" name="Shape 22"/>
-          <p:cNvSpPr/>
-          <p:nvPr/>
-        </p:nvSpPr>
-        <p:spPr>
-          <a:xfrm>
-            <a:off x="4663440" y="1078992"/>
-            <a:ext cx="4224528" cy="1188720"/>
-          </a:xfrm>
-          <a:prstGeom prst="rect">
-            <a:avLst/>
-          </a:prstGeom>
-          <a:solidFill>
-            <a:srgbClr val="0D1B2A"/>
-          </a:solidFill>
-          <a:ln w="12700">
-            <a:solidFill>
-              <a:srgbClr val="1E3A5F"/>
-            </a:solidFill>
-            <a:prstDash val="solid"/>
-          </a:ln>
-        </p:spPr>
-      </p:sp>
-      <p:sp>
-        <p:nvSpPr>
-          <p:cNvPr id="26" name="Text 23"/>
-          <p:cNvSpPr/>
-          <p:nvPr/>
-        </p:nvSpPr>
-        <p:spPr>
-          <a:xfrm>
-            <a:off x="4791456" y="1170432"/>
-            <a:ext cx="3968496" cy="1005840"/>
-          </a:xfrm>
-          <a:prstGeom prst="rect">
-            <a:avLst/>
-          </a:prstGeom>
-          <a:noFill/>
-          <a:ln/>
-        </p:spPr>
-        <p:txBody>
-          <a:bodyPr wrap="square" lIns="0" tIns="0" rIns="0" bIns="0" rtlCol="0" anchor="t"/>
-          <a:lstStyle/>
-          <a:p>
-            <a:pPr marL="0" indent="0">
-              <a:buNone/>
-            </a:pPr>
-            <a:r>
-              <a:rPr lang="en-US" sz="980" dirty="0">
-                <a:solidFill>
-                  <a:srgbClr val="7DD3FC"/>
-                </a:solidFill>
-                <a:latin typeface="Consolas" pitchFamily="34" charset="0"/>
-                <a:ea typeface="Consolas" pitchFamily="34" charset="-122"/>
-                <a:cs typeface="Consolas" pitchFamily="34" charset="-120"/>
-              </a:rPr>
-              <a:t># Loop over a list</a:t>
-            </a:r>
-            <a:endParaRPr lang="en-US" sz="980" dirty="0"/>
-          </a:p>
-          <a:p>
-            <a:pPr marL="0" indent="0">
-              <a:buNone/>
-            </a:pPr>
-            <a:r>
-              <a:rPr lang="en-US" sz="980" dirty="0">
-                <a:solidFill>
-                  <a:srgbClr val="7DD3FC"/>
-                </a:solidFill>
-                <a:latin typeface="Consolas" pitchFamily="34" charset="0"/>
-                <a:ea typeface="Consolas" pitchFamily="34" charset="-122"/>
-                <a:cs typeface="Consolas" pitchFamily="34" charset="-120"/>
-              </a:rPr>
-              <a:t>fruits = ['apple', 'mango', 'kiwi']</a:t>
-            </a:r>
-            <a:endParaRPr lang="en-US" sz="980" dirty="0"/>
-          </a:p>
-          <a:p>
-            <a:pPr marL="0" indent="0">
-              <a:buNone/>
-            </a:pPr>
-            <a:r>
-              <a:rPr lang="en-US" sz="980" dirty="0">
-                <a:solidFill>
-                  <a:srgbClr val="7DD3FC"/>
-                </a:solidFill>
-                <a:latin typeface="Consolas" pitchFamily="34" charset="0"/>
-                <a:ea typeface="Consolas" pitchFamily="34" charset="-122"/>
-                <a:cs typeface="Consolas" pitchFamily="34" charset="-120"/>
-              </a:rPr>
-              <a:t>for fruit in fruits:</a:t>
-            </a:r>
-            <a:endParaRPr lang="en-US" sz="980" dirty="0"/>
-          </a:p>
-          <a:p>
-            <a:pPr marL="0" indent="0">
-              <a:buNone/>
-            </a:pPr>
-            <a:r>
-              <a:rPr lang="en-US" sz="980" dirty="0">
-                <a:solidFill>
-                  <a:srgbClr val="7DD3FC"/>
-                </a:solidFill>
-                <a:latin typeface="Consolas" pitchFamily="34" charset="0"/>
-                <a:ea typeface="Consolas" pitchFamily="34" charset="-122"/>
-                <a:cs typeface="Consolas" pitchFamily="34" charset="-120"/>
-              </a:rPr>
-              <a:t>    print(fruit.upper())</a:t>
-            </a:r>
-            <a:endParaRPr lang="en-US" sz="980" dirty="0"/>
-          </a:p>
-          <a:p>
-            <a:pPr marL="0" indent="0">
-              <a:buNone/>
-            </a:pPr>
-            <a:endParaRPr lang="en-US" sz="980" dirty="0"/>
-          </a:p>
-          <a:p>
-            <a:pPr marL="0" indent="0">
-              <a:buNone/>
-            </a:pPr>
-            <a:r>
-              <a:rPr lang="en-US" sz="980" dirty="0">
-                <a:solidFill>
-                  <a:srgbClr val="7DD3FC"/>
-                </a:solidFill>
-                <a:latin typeface="Consolas" pitchFamily="34" charset="0"/>
-                <a:ea typeface="Consolas" pitchFamily="34" charset="-122"/>
-                <a:cs typeface="Consolas" pitchFamily="34" charset="-120"/>
-              </a:rPr>
-              <a:t># Loop over dict key-value pairs</a:t>
-            </a:r>
-            <a:endParaRPr lang="en-US" sz="980" dirty="0"/>
-          </a:p>
-          <a:p>
-            <a:pPr marL="0" indent="0">
-              <a:buNone/>
-            </a:pPr>
-            <a:r>
-              <a:rPr lang="en-US" sz="980" dirty="0">
-                <a:solidFill>
-                  <a:srgbClr val="7DD3FC"/>
-                </a:solidFill>
-                <a:latin typeface="Consolas" pitchFamily="34" charset="0"/>
-                <a:ea typeface="Consolas" pitchFamily="34" charset="-122"/>
-                <a:cs typeface="Consolas" pitchFamily="34" charset="-120"/>
-              </a:rPr>
-              <a:t>scores = {'Alice': 92, 'Bob': 78, 'Carol': 88}</a:t>
-            </a:r>
-            <a:endParaRPr lang="en-US" sz="980" dirty="0"/>
-          </a:p>
-          <a:p>
-            <a:pPr marL="0" indent="0">
-              <a:buNone/>
-            </a:pPr>
-            <a:r>
-              <a:rPr lang="en-US" sz="980" dirty="0">
-                <a:solidFill>
-                  <a:srgbClr val="7DD3FC"/>
-                </a:solidFill>
-                <a:latin typeface="Consolas" pitchFamily="34" charset="0"/>
-                <a:ea typeface="Consolas" pitchFamily="34" charset="-122"/>
-                <a:cs typeface="Consolas" pitchFamily="34" charset="-120"/>
-              </a:rPr>
-              <a:t>for name, score in scores.items():</a:t>
-            </a:r>
-            <a:endParaRPr lang="en-US" sz="980" dirty="0"/>
-          </a:p>
-          <a:p>
-            <a:pPr marL="0" indent="0">
-              <a:buNone/>
-            </a:pPr>
-            <a:r>
-              <a:rPr lang="en-US" sz="980" dirty="0">
-                <a:solidFill>
-                  <a:srgbClr val="7DD3FC"/>
-                </a:solidFill>
-                <a:latin typeface="Consolas" pitchFamily="34" charset="0"/>
-                <a:ea typeface="Consolas" pitchFamily="34" charset="-122"/>
-                <a:cs typeface="Consolas" pitchFamily="34" charset="-120"/>
-              </a:rPr>
-              <a:t>    grade = "Pass" if score &gt;= 80 else "Fail"</a:t>
-            </a:r>
-            <a:endParaRPr lang="en-US" sz="980" dirty="0"/>
-          </a:p>
-          <a:p>
-            <a:pPr marL="0" indent="0">
-              <a:buNone/>
-            </a:pPr>
-            <a:r>
-              <a:rPr lang="en-US" sz="980" dirty="0">
-                <a:solidFill>
-                  <a:srgbClr val="7DD3FC"/>
-                </a:solidFill>
-                <a:latin typeface="Consolas" pitchFamily="34" charset="0"/>
-                <a:ea typeface="Consolas" pitchFamily="34" charset="-122"/>
-                <a:cs typeface="Consolas" pitchFamily="34" charset="-120"/>
-              </a:rPr>
-              <a:t>    print(f"{name}: {score} → {grade}")</a:t>
-            </a:r>
-            <a:endParaRPr lang="en-US" sz="980" dirty="0"/>
-          </a:p>
-        </p:txBody>
-      </p:sp>
-      <p:sp>
-        <p:nvSpPr>
-          <p:cNvPr id="27" name="Shape 24"/>
-          <p:cNvSpPr/>
-          <p:nvPr/>
-        </p:nvSpPr>
-        <p:spPr>
-          <a:xfrm>
-            <a:off x="4663440" y="2322576"/>
-            <a:ext cx="3108960" cy="246888"/>
+          <p:cNvPr id="45" name="Shape 28">
+            <a:extLst>
+              <a:ext uri="{FF2B5EF4-FFF2-40B4-BE49-F238E27FC236}">
+                <a16:creationId xmlns:a16="http://schemas.microsoft.com/office/drawing/2014/main" id="{0C70514F-B2B0-745C-E3CF-74577B238E8B}"/>
+              </a:ext>
+            </a:extLst>
+          </p:cNvPr>
+          <p:cNvSpPr/>
+          <p:nvPr/>
+        </p:nvSpPr>
+        <p:spPr>
+          <a:xfrm>
+            <a:off x="7040630" y="3667273"/>
+            <a:ext cx="1741856" cy="175313"/>
           </a:xfrm>
           <a:prstGeom prst="rect">
             <a:avLst/>
@@ -9073,14 +9264,20 @@
       </p:sp>
       <p:sp>
         <p:nvSpPr>
-          <p:cNvPr id="28" name="Text 25"/>
-          <p:cNvSpPr/>
-          <p:nvPr/>
-        </p:nvSpPr>
-        <p:spPr>
-          <a:xfrm>
-            <a:off x="4663440" y="2322576"/>
-            <a:ext cx="3108960" cy="246888"/>
+          <p:cNvPr id="46" name="Text 29">
+            <a:extLst>
+              <a:ext uri="{FF2B5EF4-FFF2-40B4-BE49-F238E27FC236}">
+                <a16:creationId xmlns:a16="http://schemas.microsoft.com/office/drawing/2014/main" id="{9A024F23-1937-FC3F-05B9-3C74A5C28A78}"/>
+              </a:ext>
+            </a:extLst>
+          </p:cNvPr>
+          <p:cNvSpPr/>
+          <p:nvPr/>
+        </p:nvSpPr>
+        <p:spPr>
+          <a:xfrm>
+            <a:off x="7005791" y="3636512"/>
+            <a:ext cx="1811534" cy="240010"/>
           </a:xfrm>
           <a:prstGeom prst="rect">
             <a:avLst/>
@@ -9104,685 +9301,9 @@
                 <a:ea typeface="Calibri" pitchFamily="34" charset="-122"/>
                 <a:cs typeface="Calibri" pitchFamily="34" charset="-120"/>
               </a:rPr>
-              <a:t>EXAMPLE 2 — range + enumerate</a:t>
+              <a:t>EXAMPLE 3 — break / continue in for</a:t>
             </a:r>
             <a:endParaRPr lang="en-US" sz="850" dirty="0"/>
-          </a:p>
-        </p:txBody>
-      </p:sp>
-      <p:sp>
-        <p:nvSpPr>
-          <p:cNvPr id="29" name="Shape 26"/>
-          <p:cNvSpPr/>
-          <p:nvPr/>
-        </p:nvSpPr>
-        <p:spPr>
-          <a:xfrm>
-            <a:off x="4663440" y="2596896"/>
-            <a:ext cx="4224528" cy="1115568"/>
-          </a:xfrm>
-          <a:prstGeom prst="rect">
-            <a:avLst/>
-          </a:prstGeom>
-          <a:solidFill>
-            <a:srgbClr val="0D1B2A"/>
-          </a:solidFill>
-          <a:ln w="12700">
-            <a:solidFill>
-              <a:srgbClr val="1E3A5F"/>
-            </a:solidFill>
-            <a:prstDash val="solid"/>
-          </a:ln>
-        </p:spPr>
-      </p:sp>
-      <p:sp>
-        <p:nvSpPr>
-          <p:cNvPr id="30" name="Text 27"/>
-          <p:cNvSpPr/>
-          <p:nvPr/>
-        </p:nvSpPr>
-        <p:spPr>
-          <a:xfrm>
-            <a:off x="4791456" y="2688336"/>
-            <a:ext cx="3968496" cy="932688"/>
-          </a:xfrm>
-          <a:prstGeom prst="rect">
-            <a:avLst/>
-          </a:prstGeom>
-          <a:noFill/>
-          <a:ln/>
-        </p:spPr>
-        <p:txBody>
-          <a:bodyPr wrap="square" lIns="0" tIns="0" rIns="0" bIns="0" rtlCol="0" anchor="t"/>
-          <a:lstStyle/>
-          <a:p>
-            <a:pPr marL="0" indent="0">
-              <a:buNone/>
-            </a:pPr>
-            <a:r>
-              <a:rPr lang="en-US" sz="980" dirty="0">
-                <a:solidFill>
-                  <a:srgbClr val="7DD3FC"/>
-                </a:solidFill>
-                <a:latin typeface="Consolas" pitchFamily="34" charset="0"/>
-                <a:ea typeface="Consolas" pitchFamily="34" charset="-122"/>
-                <a:cs typeface="Consolas" pitchFamily="34" charset="-120"/>
-              </a:rPr>
-              <a:t># range: count 0 to 4</a:t>
-            </a:r>
-            <a:endParaRPr lang="en-US" sz="980" dirty="0"/>
-          </a:p>
-          <a:p>
-            <a:pPr marL="0" indent="0">
-              <a:buNone/>
-            </a:pPr>
-            <a:r>
-              <a:rPr lang="en-US" sz="980" dirty="0">
-                <a:solidFill>
-                  <a:srgbClr val="7DD3FC"/>
-                </a:solidFill>
-                <a:latin typeface="Consolas" pitchFamily="34" charset="0"/>
-                <a:ea typeface="Consolas" pitchFamily="34" charset="-122"/>
-                <a:cs typeface="Consolas" pitchFamily="34" charset="-120"/>
-              </a:rPr>
-              <a:t>for i in range(5):</a:t>
-            </a:r>
-            <a:endParaRPr lang="en-US" sz="980" dirty="0"/>
-          </a:p>
-          <a:p>
-            <a:pPr marL="0" indent="0">
-              <a:buNone/>
-            </a:pPr>
-            <a:r>
-              <a:rPr lang="en-US" sz="980" dirty="0">
-                <a:solidFill>
-                  <a:srgbClr val="7DD3FC"/>
-                </a:solidFill>
-                <a:latin typeface="Consolas" pitchFamily="34" charset="0"/>
-                <a:ea typeface="Consolas" pitchFamily="34" charset="-122"/>
-                <a:cs typeface="Consolas" pitchFamily="34" charset="-120"/>
-              </a:rPr>
-              <a:t>    print(i, end=" ")   # 0 1 2 3 4</a:t>
-            </a:r>
-            <a:endParaRPr lang="en-US" sz="980" dirty="0"/>
-          </a:p>
-          <a:p>
-            <a:pPr marL="0" indent="0">
-              <a:buNone/>
-            </a:pPr>
-            <a:endParaRPr lang="en-US" sz="980" dirty="0"/>
-          </a:p>
-          <a:p>
-            <a:pPr marL="0" indent="0">
-              <a:buNone/>
-            </a:pPr>
-            <a:r>
-              <a:rPr lang="en-US" sz="980" dirty="0">
-                <a:solidFill>
-                  <a:srgbClr val="7DD3FC"/>
-                </a:solidFill>
-                <a:latin typeface="Consolas" pitchFamily="34" charset="0"/>
-                <a:ea typeface="Consolas" pitchFamily="34" charset="-122"/>
-                <a:cs typeface="Consolas" pitchFamily="34" charset="-120"/>
-              </a:rPr>
-              <a:t># range with step</a:t>
-            </a:r>
-            <a:endParaRPr lang="en-US" sz="980" dirty="0"/>
-          </a:p>
-          <a:p>
-            <a:pPr marL="0" indent="0">
-              <a:buNone/>
-            </a:pPr>
-            <a:r>
-              <a:rPr lang="en-US" sz="980" dirty="0">
-                <a:solidFill>
-                  <a:srgbClr val="7DD3FC"/>
-                </a:solidFill>
-                <a:latin typeface="Consolas" pitchFamily="34" charset="0"/>
-                <a:ea typeface="Consolas" pitchFamily="34" charset="-122"/>
-                <a:cs typeface="Consolas" pitchFamily="34" charset="-120"/>
-              </a:rPr>
-              <a:t>for i in range(0, 20, 5):</a:t>
-            </a:r>
-            <a:endParaRPr lang="en-US" sz="980" dirty="0"/>
-          </a:p>
-          <a:p>
-            <a:pPr marL="0" indent="0">
-              <a:buNone/>
-            </a:pPr>
-            <a:r>
-              <a:rPr lang="en-US" sz="980" dirty="0">
-                <a:solidFill>
-                  <a:srgbClr val="7DD3FC"/>
-                </a:solidFill>
-                <a:latin typeface="Consolas" pitchFamily="34" charset="0"/>
-                <a:ea typeface="Consolas" pitchFamily="34" charset="-122"/>
-                <a:cs typeface="Consolas" pitchFamily="34" charset="-120"/>
-              </a:rPr>
-              <a:t>    print(i, end=" ")   # 0 5 10 15</a:t>
-            </a:r>
-            <a:endParaRPr lang="en-US" sz="980" dirty="0"/>
-          </a:p>
-          <a:p>
-            <a:pPr marL="0" indent="0">
-              <a:buNone/>
-            </a:pPr>
-            <a:endParaRPr lang="en-US" sz="980" dirty="0"/>
-          </a:p>
-          <a:p>
-            <a:pPr marL="0" indent="0">
-              <a:buNone/>
-            </a:pPr>
-            <a:r>
-              <a:rPr lang="en-US" sz="980" dirty="0">
-                <a:solidFill>
-                  <a:srgbClr val="7DD3FC"/>
-                </a:solidFill>
-                <a:latin typeface="Consolas" pitchFamily="34" charset="0"/>
-                <a:ea typeface="Consolas" pitchFamily="34" charset="-122"/>
-                <a:cs typeface="Consolas" pitchFamily="34" charset="-120"/>
-              </a:rPr>
-              <a:t># enumerate: get index + value</a:t>
-            </a:r>
-            <a:endParaRPr lang="en-US" sz="980" dirty="0"/>
-          </a:p>
-          <a:p>
-            <a:pPr marL="0" indent="0">
-              <a:buNone/>
-            </a:pPr>
-            <a:r>
-              <a:rPr lang="en-US" sz="980" dirty="0">
-                <a:solidFill>
-                  <a:srgbClr val="7DD3FC"/>
-                </a:solidFill>
-                <a:latin typeface="Consolas" pitchFamily="34" charset="0"/>
-                <a:ea typeface="Consolas" pitchFamily="34" charset="-122"/>
-                <a:cs typeface="Consolas" pitchFamily="34" charset="-120"/>
-              </a:rPr>
-              <a:t>tasks = ['deploy', 'test', 'monitor']</a:t>
-            </a:r>
-            <a:endParaRPr lang="en-US" sz="980" dirty="0"/>
-          </a:p>
-          <a:p>
-            <a:pPr marL="0" indent="0">
-              <a:buNone/>
-            </a:pPr>
-            <a:r>
-              <a:rPr lang="en-US" sz="980" dirty="0">
-                <a:solidFill>
-                  <a:srgbClr val="7DD3FC"/>
-                </a:solidFill>
-                <a:latin typeface="Consolas" pitchFamily="34" charset="0"/>
-                <a:ea typeface="Consolas" pitchFamily="34" charset="-122"/>
-                <a:cs typeface="Consolas" pitchFamily="34" charset="-120"/>
-              </a:rPr>
-              <a:t>for idx, task in enumerate(tasks, start=1):</a:t>
-            </a:r>
-            <a:endParaRPr lang="en-US" sz="980" dirty="0"/>
-          </a:p>
-          <a:p>
-            <a:pPr marL="0" indent="0">
-              <a:buNone/>
-            </a:pPr>
-            <a:r>
-              <a:rPr lang="en-US" sz="980" dirty="0">
-                <a:solidFill>
-                  <a:srgbClr val="7DD3FC"/>
-                </a:solidFill>
-                <a:latin typeface="Consolas" pitchFamily="34" charset="0"/>
-                <a:ea typeface="Consolas" pitchFamily="34" charset="-122"/>
-                <a:cs typeface="Consolas" pitchFamily="34" charset="-120"/>
-              </a:rPr>
-              <a:t>    print(f"Step {idx}: {task}")</a:t>
-            </a:r>
-            <a:endParaRPr lang="en-US" sz="980" dirty="0"/>
-          </a:p>
-        </p:txBody>
-      </p:sp>
-      <p:sp>
-        <p:nvSpPr>
-          <p:cNvPr id="31" name="Shape 28"/>
-          <p:cNvSpPr/>
-          <p:nvPr/>
-        </p:nvSpPr>
-        <p:spPr>
-          <a:xfrm>
-            <a:off x="4663440" y="3767328"/>
-            <a:ext cx="3474720" cy="246888"/>
-          </a:xfrm>
-          <a:prstGeom prst="rect">
-            <a:avLst/>
-          </a:prstGeom>
-          <a:solidFill>
-            <a:srgbClr val="34D399"/>
-          </a:solidFill>
-          <a:ln w="12700">
-            <a:solidFill>
-              <a:srgbClr val="34D399"/>
-            </a:solidFill>
-            <a:prstDash val="solid"/>
-          </a:ln>
-        </p:spPr>
-      </p:sp>
-      <p:sp>
-        <p:nvSpPr>
-          <p:cNvPr id="32" name="Text 29"/>
-          <p:cNvSpPr/>
-          <p:nvPr/>
-        </p:nvSpPr>
-        <p:spPr>
-          <a:xfrm>
-            <a:off x="4663440" y="3767328"/>
-            <a:ext cx="3474720" cy="246888"/>
-          </a:xfrm>
-          <a:prstGeom prst="rect">
-            <a:avLst/>
-          </a:prstGeom>
-          <a:noFill/>
-          <a:ln/>
-        </p:spPr>
-        <p:txBody>
-          <a:bodyPr wrap="square" lIns="0" tIns="0" rIns="0" bIns="0" rtlCol="0" anchor="ctr"/>
-          <a:lstStyle/>
-          <a:p>
-            <a:pPr marL="0" indent="0" algn="ctr">
-              <a:buNone/>
-            </a:pPr>
-            <a:r>
-              <a:rPr lang="en-US" sz="850" b="1" dirty="0">
-                <a:solidFill>
-                  <a:srgbClr val="0F172A"/>
-                </a:solidFill>
-                <a:latin typeface="Calibri" pitchFamily="34" charset="0"/>
-                <a:ea typeface="Calibri" pitchFamily="34" charset="-122"/>
-                <a:cs typeface="Calibri" pitchFamily="34" charset="-120"/>
-              </a:rPr>
-              <a:t>EXAMPLE 3 — break / continue in for</a:t>
-            </a:r>
-            <a:endParaRPr lang="en-US" sz="850" dirty="0"/>
-          </a:p>
-        </p:txBody>
-      </p:sp>
-      <p:sp>
-        <p:nvSpPr>
-          <p:cNvPr id="33" name="Shape 30"/>
-          <p:cNvSpPr/>
-          <p:nvPr/>
-        </p:nvSpPr>
-        <p:spPr>
-          <a:xfrm>
-            <a:off x="4663440" y="4041648"/>
-            <a:ext cx="4224528" cy="914400"/>
-          </a:xfrm>
-          <a:prstGeom prst="rect">
-            <a:avLst/>
-          </a:prstGeom>
-          <a:solidFill>
-            <a:srgbClr val="0D1B2A"/>
-          </a:solidFill>
-          <a:ln w="12700">
-            <a:solidFill>
-              <a:srgbClr val="1E3A5F"/>
-            </a:solidFill>
-            <a:prstDash val="solid"/>
-          </a:ln>
-        </p:spPr>
-      </p:sp>
-      <p:sp>
-        <p:nvSpPr>
-          <p:cNvPr id="34" name="Text 31"/>
-          <p:cNvSpPr/>
-          <p:nvPr/>
-        </p:nvSpPr>
-        <p:spPr>
-          <a:xfrm>
-            <a:off x="4791456" y="4133088"/>
-            <a:ext cx="3968496" cy="731520"/>
-          </a:xfrm>
-          <a:prstGeom prst="rect">
-            <a:avLst/>
-          </a:prstGeom>
-          <a:noFill/>
-          <a:ln/>
-        </p:spPr>
-        <p:txBody>
-          <a:bodyPr wrap="square" lIns="0" tIns="0" rIns="0" bIns="0" rtlCol="0" anchor="t"/>
-          <a:lstStyle/>
-          <a:p>
-            <a:pPr marL="0" indent="0">
-              <a:buNone/>
-            </a:pPr>
-            <a:r>
-              <a:rPr lang="en-US" sz="980" dirty="0">
-                <a:solidFill>
-                  <a:srgbClr val="7DD3FC"/>
-                </a:solidFill>
-                <a:latin typeface="Consolas" pitchFamily="34" charset="0"/>
-                <a:ea typeface="Consolas" pitchFamily="34" charset="-122"/>
-                <a:cs typeface="Consolas" pitchFamily="34" charset="-120"/>
-              </a:rPr>
-              <a:t>services = ['db','cache','api','queue','ui']</a:t>
-            </a:r>
-            <a:endParaRPr lang="en-US" sz="980" dirty="0"/>
-          </a:p>
-          <a:p>
-            <a:pPr marL="0" indent="0">
-              <a:buNone/>
-            </a:pPr>
-            <a:endParaRPr lang="en-US" sz="980" dirty="0"/>
-          </a:p>
-          <a:p>
-            <a:pPr marL="0" indent="0">
-              <a:buNone/>
-            </a:pPr>
-            <a:r>
-              <a:rPr lang="en-US" sz="980" dirty="0">
-                <a:solidFill>
-                  <a:srgbClr val="7DD3FC"/>
-                </a:solidFill>
-                <a:latin typeface="Consolas" pitchFamily="34" charset="0"/>
-                <a:ea typeface="Consolas" pitchFamily="34" charset="-122"/>
-                <a:cs typeface="Consolas" pitchFamily="34" charset="-120"/>
-              </a:rPr>
-              <a:t># Find the first failing service</a:t>
-            </a:r>
-            <a:endParaRPr lang="en-US" sz="980" dirty="0"/>
-          </a:p>
-          <a:p>
-            <a:pPr marL="0" indent="0">
-              <a:buNone/>
-            </a:pPr>
-            <a:r>
-              <a:rPr lang="en-US" sz="980" dirty="0">
-                <a:solidFill>
-                  <a:srgbClr val="7DD3FC"/>
-                </a:solidFill>
-                <a:latin typeface="Consolas" pitchFamily="34" charset="0"/>
-                <a:ea typeface="Consolas" pitchFamily="34" charset="-122"/>
-                <a:cs typeface="Consolas" pitchFamily="34" charset="-120"/>
-              </a:rPr>
-              <a:t>for svc in services:</a:t>
-            </a:r>
-            <a:endParaRPr lang="en-US" sz="980" dirty="0"/>
-          </a:p>
-          <a:p>
-            <a:pPr marL="0" indent="0">
-              <a:buNone/>
-            </a:pPr>
-            <a:r>
-              <a:rPr lang="en-US" sz="980" dirty="0">
-                <a:solidFill>
-                  <a:srgbClr val="7DD3FC"/>
-                </a:solidFill>
-                <a:latin typeface="Consolas" pitchFamily="34" charset="0"/>
-                <a:ea typeface="Consolas" pitchFamily="34" charset="-122"/>
-                <a:cs typeface="Consolas" pitchFamily="34" charset="-120"/>
-              </a:rPr>
-              <a:t>    if svc == 'api':</a:t>
-            </a:r>
-            <a:endParaRPr lang="en-US" sz="980" dirty="0"/>
-          </a:p>
-          <a:p>
-            <a:pPr marL="0" indent="0">
-              <a:buNone/>
-            </a:pPr>
-            <a:r>
-              <a:rPr lang="en-US" sz="980" dirty="0">
-                <a:solidFill>
-                  <a:srgbClr val="7DD3FC"/>
-                </a:solidFill>
-                <a:latin typeface="Consolas" pitchFamily="34" charset="0"/>
-                <a:ea typeface="Consolas" pitchFamily="34" charset="-122"/>
-                <a:cs typeface="Consolas" pitchFamily="34" charset="-120"/>
-              </a:rPr>
-              <a:t>        print(f"FAILED: {svc} — stopping check")</a:t>
-            </a:r>
-            <a:endParaRPr lang="en-US" sz="980" dirty="0"/>
-          </a:p>
-          <a:p>
-            <a:pPr marL="0" indent="0">
-              <a:buNone/>
-            </a:pPr>
-            <a:r>
-              <a:rPr lang="en-US" sz="980" dirty="0">
-                <a:solidFill>
-                  <a:srgbClr val="7DD3FC"/>
-                </a:solidFill>
-                <a:latin typeface="Consolas" pitchFamily="34" charset="0"/>
-                <a:ea typeface="Consolas" pitchFamily="34" charset="-122"/>
-                <a:cs typeface="Consolas" pitchFamily="34" charset="-120"/>
-              </a:rPr>
-              <a:t>        break</a:t>
-            </a:r>
-            <a:endParaRPr lang="en-US" sz="980" dirty="0"/>
-          </a:p>
-          <a:p>
-            <a:pPr marL="0" indent="0">
-              <a:buNone/>
-            </a:pPr>
-            <a:r>
-              <a:rPr lang="en-US" sz="980" dirty="0">
-                <a:solidFill>
-                  <a:srgbClr val="7DD3FC"/>
-                </a:solidFill>
-                <a:latin typeface="Consolas" pitchFamily="34" charset="0"/>
-                <a:ea typeface="Consolas" pitchFamily="34" charset="-122"/>
-                <a:cs typeface="Consolas" pitchFamily="34" charset="-120"/>
-              </a:rPr>
-              <a:t>    print(f"OK: {svc}")</a:t>
-            </a:r>
-            <a:endParaRPr lang="en-US" sz="980" dirty="0"/>
-          </a:p>
-          <a:p>
-            <a:pPr marL="0" indent="0">
-              <a:buNone/>
-            </a:pPr>
-            <a:endParaRPr lang="en-US" sz="980" dirty="0"/>
-          </a:p>
-          <a:p>
-            <a:pPr marL="0" indent="0">
-              <a:buNone/>
-            </a:pPr>
-            <a:r>
-              <a:rPr lang="en-US" sz="980" dirty="0">
-                <a:solidFill>
-                  <a:srgbClr val="7DD3FC"/>
-                </a:solidFill>
-                <a:latin typeface="Consolas" pitchFamily="34" charset="0"/>
-                <a:ea typeface="Consolas" pitchFamily="34" charset="-122"/>
-                <a:cs typeface="Consolas" pitchFamily="34" charset="-120"/>
-              </a:rPr>
-              <a:t># Skip unknown entries</a:t>
-            </a:r>
-            <a:endParaRPr lang="en-US" sz="980" dirty="0"/>
-          </a:p>
-          <a:p>
-            <a:pPr marL="0" indent="0">
-              <a:buNone/>
-            </a:pPr>
-            <a:r>
-              <a:rPr lang="en-US" sz="980" dirty="0">
-                <a:solidFill>
-                  <a:srgbClr val="7DD3FC"/>
-                </a:solidFill>
-                <a:latin typeface="Consolas" pitchFamily="34" charset="0"/>
-                <a:ea typeface="Consolas" pitchFamily="34" charset="-122"/>
-                <a:cs typeface="Consolas" pitchFamily="34" charset="-120"/>
-              </a:rPr>
-              <a:t>for svc in services:</a:t>
-            </a:r>
-            <a:endParaRPr lang="en-US" sz="980" dirty="0"/>
-          </a:p>
-          <a:p>
-            <a:pPr marL="0" indent="0">
-              <a:buNone/>
-            </a:pPr>
-            <a:r>
-              <a:rPr lang="en-US" sz="980" dirty="0">
-                <a:solidFill>
-                  <a:srgbClr val="7DD3FC"/>
-                </a:solidFill>
-                <a:latin typeface="Consolas" pitchFamily="34" charset="0"/>
-                <a:ea typeface="Consolas" pitchFamily="34" charset="-122"/>
-                <a:cs typeface="Consolas" pitchFamily="34" charset="-120"/>
-              </a:rPr>
-              <a:t>    if svc == 'queue': continue  # skip</a:t>
-            </a:r>
-            <a:endParaRPr lang="en-US" sz="980" dirty="0"/>
-          </a:p>
-          <a:p>
-            <a:pPr marL="0" indent="0">
-              <a:buNone/>
-            </a:pPr>
-            <a:r>
-              <a:rPr lang="en-US" sz="980" dirty="0">
-                <a:solidFill>
-                  <a:srgbClr val="7DD3FC"/>
-                </a:solidFill>
-                <a:latin typeface="Consolas" pitchFamily="34" charset="0"/>
-                <a:ea typeface="Consolas" pitchFamily="34" charset="-122"/>
-                <a:cs typeface="Consolas" pitchFamily="34" charset="-120"/>
-              </a:rPr>
-              <a:t>    print("Monitoring:", svc)</a:t>
-            </a:r>
-            <a:endParaRPr lang="en-US" sz="980" dirty="0"/>
-          </a:p>
-        </p:txBody>
-      </p:sp>
-      <p:sp>
-        <p:nvSpPr>
-          <p:cNvPr id="35" name="Shape 32"/>
-          <p:cNvSpPr/>
-          <p:nvPr/>
-        </p:nvSpPr>
-        <p:spPr>
-          <a:xfrm>
-            <a:off x="4663440" y="5010912"/>
-            <a:ext cx="4224528" cy="475488"/>
-          </a:xfrm>
-          <a:prstGeom prst="rect">
-            <a:avLst/>
-          </a:prstGeom>
-          <a:solidFill>
-            <a:srgbClr val="0D1B2A"/>
-          </a:solidFill>
-          <a:ln w="12700">
-            <a:solidFill>
-              <a:srgbClr val="34D399"/>
-            </a:solidFill>
-            <a:prstDash val="solid"/>
-          </a:ln>
-        </p:spPr>
-      </p:sp>
-      <p:sp>
-        <p:nvSpPr>
-          <p:cNvPr id="36" name="Shape 33"/>
-          <p:cNvSpPr/>
-          <p:nvPr/>
-        </p:nvSpPr>
-        <p:spPr>
-          <a:xfrm>
-            <a:off x="4663440" y="5010912"/>
-            <a:ext cx="64008" cy="475488"/>
-          </a:xfrm>
-          <a:prstGeom prst="rect">
-            <a:avLst/>
-          </a:prstGeom>
-          <a:solidFill>
-            <a:srgbClr val="34D399"/>
-          </a:solidFill>
-          <a:ln w="12700">
-            <a:solidFill>
-              <a:srgbClr val="34D399"/>
-            </a:solidFill>
-            <a:prstDash val="solid"/>
-          </a:ln>
-        </p:spPr>
-      </p:sp>
-      <p:sp>
-        <p:nvSpPr>
-          <p:cNvPr id="37" name="Text 34"/>
-          <p:cNvSpPr/>
-          <p:nvPr/>
-        </p:nvSpPr>
-        <p:spPr>
-          <a:xfrm>
-            <a:off x="4809744" y="5047488"/>
-            <a:ext cx="4041648" cy="219456"/>
-          </a:xfrm>
-          <a:prstGeom prst="rect">
-            <a:avLst/>
-          </a:prstGeom>
-          <a:noFill/>
-          <a:ln/>
-        </p:spPr>
-        <p:txBody>
-          <a:bodyPr wrap="square" lIns="0" tIns="0" rIns="0" bIns="0" rtlCol="0" anchor="ctr"/>
-          <a:lstStyle/>
-          <a:p>
-            <a:pPr marL="0" indent="0">
-              <a:buNone/>
-            </a:pPr>
-            <a:r>
-              <a:rPr lang="en-US" sz="1100" b="1" dirty="0">
-                <a:solidFill>
-                  <a:srgbClr val="34D399"/>
-                </a:solidFill>
-                <a:latin typeface="Calibri" pitchFamily="34" charset="0"/>
-                <a:ea typeface="Calibri" pitchFamily="34" charset="-122"/>
-                <a:cs typeface="Calibri" pitchFamily="34" charset="-120"/>
-              </a:rPr>
-              <a:t>🔗  ControlFlowExamples.md</a:t>
-            </a:r>
-            <a:endParaRPr lang="en-US" sz="1100" dirty="0"/>
-          </a:p>
-        </p:txBody>
-      </p:sp>
-      <p:sp>
-        <p:nvSpPr>
-          <p:cNvPr id="38" name="Text 35">
-            <a:hlinkClick r:id="rId3"/>
-          </p:cNvPr>
-          <p:cNvSpPr/>
-          <p:nvPr/>
-        </p:nvSpPr>
-        <p:spPr>
-          <a:xfrm>
-            <a:off x="4809744" y="5266944"/>
-            <a:ext cx="4041648" cy="182880"/>
-          </a:xfrm>
-          <a:prstGeom prst="rect">
-            <a:avLst/>
-          </a:prstGeom>
-          <a:noFill/>
-          <a:ln/>
-        </p:spPr>
-        <p:txBody>
-          <a:bodyPr wrap="square" lIns="0" tIns="0" rIns="0" bIns="0" rtlCol="0" anchor="ctr"/>
-          <a:lstStyle/>
-          <a:p>
-            <a:pPr marL="0" indent="0">
-              <a:buNone/>
-            </a:pPr>
-            <a:r>
-              <a:rPr lang="en-US" sz="750" u="sng" dirty="0">
-                <a:solidFill>
-                  <a:srgbClr val="64748B"/>
-                </a:solidFill>
-                <a:latin typeface="Calibri" pitchFamily="34" charset="0"/>
-                <a:ea typeface="Calibri" pitchFamily="34" charset="-122"/>
-                <a:cs typeface="Calibri" pitchFamily="34" charset="-120"/>
-                <a:hlinkClick r:id="rId3">
-                  <a:extLst>
-                    <a:ext uri="{A12FA001-AC4F-418D-AE19-62706E023703}">
-                      <ahyp:hlinkClr xmlns:ahyp="http://schemas.microsoft.com/office/drawing/2018/hyperlinkcolor" val="tx"/>
-                    </a:ext>
-                  </a:extLst>
-                </a:hlinkClick>
-              </a:rPr>
-              <a:t>https://github.com/reachsatyavs/python-tutorials/blob/main/ControlFlows/ControlFlowExamples.md</a:t>
-            </a:r>
-            <a:endParaRPr lang="en-US" sz="750" dirty="0"/>
           </a:p>
         </p:txBody>
       </p:sp>
